--- a/презентация к диплому.pptx
+++ b/презентация к диплому.pptx
@@ -8,13 +8,13 @@
     <p:sldId id="256" r:id="rId2"/>
     <p:sldId id="257" r:id="rId3"/>
     <p:sldId id="258" r:id="rId4"/>
-    <p:sldId id="259" r:id="rId5"/>
-    <p:sldId id="260" r:id="rId6"/>
-    <p:sldId id="261" r:id="rId7"/>
-    <p:sldId id="262" r:id="rId8"/>
-    <p:sldId id="263" r:id="rId9"/>
-    <p:sldId id="264" r:id="rId10"/>
-    <p:sldId id="265" r:id="rId11"/>
+    <p:sldId id="260" r:id="rId5"/>
+    <p:sldId id="261" r:id="rId6"/>
+    <p:sldId id="262" r:id="rId7"/>
+    <p:sldId id="266" r:id="rId8"/>
+    <p:sldId id="265" r:id="rId9"/>
+    <p:sldId id="267" r:id="rId10"/>
+    <p:sldId id="268" r:id="rId11"/>
   </p:sldIdLst>
   <p:sldSz cx="12192000" cy="6858000"/>
   <p:notesSz cx="6858000" cy="9144000"/>
@@ -268,7 +268,7 @@
           <a:p>
             <a:fld id="{DAAE7CA6-6208-4769-8266-A9B1180A8781}" type="datetimeFigureOut">
               <a:rPr lang="ru-RU" smtClean="0"/>
-              <a:t>10.06.2023</a:t>
+              <a:t>24.06.2023</a:t>
             </a:fld>
             <a:endParaRPr lang="ru-RU"/>
           </a:p>
@@ -466,7 +466,7 @@
           <a:p>
             <a:fld id="{DAAE7CA6-6208-4769-8266-A9B1180A8781}" type="datetimeFigureOut">
               <a:rPr lang="ru-RU" smtClean="0"/>
-              <a:t>10.06.2023</a:t>
+              <a:t>24.06.2023</a:t>
             </a:fld>
             <a:endParaRPr lang="ru-RU"/>
           </a:p>
@@ -674,7 +674,7 @@
           <a:p>
             <a:fld id="{DAAE7CA6-6208-4769-8266-A9B1180A8781}" type="datetimeFigureOut">
               <a:rPr lang="ru-RU" smtClean="0"/>
-              <a:t>10.06.2023</a:t>
+              <a:t>24.06.2023</a:t>
             </a:fld>
             <a:endParaRPr lang="ru-RU"/>
           </a:p>
@@ -872,7 +872,7 @@
           <a:p>
             <a:fld id="{DAAE7CA6-6208-4769-8266-A9B1180A8781}" type="datetimeFigureOut">
               <a:rPr lang="ru-RU" smtClean="0"/>
-              <a:t>10.06.2023</a:t>
+              <a:t>24.06.2023</a:t>
             </a:fld>
             <a:endParaRPr lang="ru-RU"/>
           </a:p>
@@ -1147,7 +1147,7 @@
           <a:p>
             <a:fld id="{DAAE7CA6-6208-4769-8266-A9B1180A8781}" type="datetimeFigureOut">
               <a:rPr lang="ru-RU" smtClean="0"/>
-              <a:t>10.06.2023</a:t>
+              <a:t>24.06.2023</a:t>
             </a:fld>
             <a:endParaRPr lang="ru-RU"/>
           </a:p>
@@ -1412,7 +1412,7 @@
           <a:p>
             <a:fld id="{DAAE7CA6-6208-4769-8266-A9B1180A8781}" type="datetimeFigureOut">
               <a:rPr lang="ru-RU" smtClean="0"/>
-              <a:t>10.06.2023</a:t>
+              <a:t>24.06.2023</a:t>
             </a:fld>
             <a:endParaRPr lang="ru-RU"/>
           </a:p>
@@ -1824,7 +1824,7 @@
           <a:p>
             <a:fld id="{DAAE7CA6-6208-4769-8266-A9B1180A8781}" type="datetimeFigureOut">
               <a:rPr lang="ru-RU" smtClean="0"/>
-              <a:t>10.06.2023</a:t>
+              <a:t>24.06.2023</a:t>
             </a:fld>
             <a:endParaRPr lang="ru-RU"/>
           </a:p>
@@ -1965,7 +1965,7 @@
           <a:p>
             <a:fld id="{DAAE7CA6-6208-4769-8266-A9B1180A8781}" type="datetimeFigureOut">
               <a:rPr lang="ru-RU" smtClean="0"/>
-              <a:t>10.06.2023</a:t>
+              <a:t>24.06.2023</a:t>
             </a:fld>
             <a:endParaRPr lang="ru-RU"/>
           </a:p>
@@ -2078,7 +2078,7 @@
           <a:p>
             <a:fld id="{DAAE7CA6-6208-4769-8266-A9B1180A8781}" type="datetimeFigureOut">
               <a:rPr lang="ru-RU" smtClean="0"/>
-              <a:t>10.06.2023</a:t>
+              <a:t>24.06.2023</a:t>
             </a:fld>
             <a:endParaRPr lang="ru-RU"/>
           </a:p>
@@ -2389,7 +2389,7 @@
           <a:p>
             <a:fld id="{DAAE7CA6-6208-4769-8266-A9B1180A8781}" type="datetimeFigureOut">
               <a:rPr lang="ru-RU" smtClean="0"/>
-              <a:t>10.06.2023</a:t>
+              <a:t>24.06.2023</a:t>
             </a:fld>
             <a:endParaRPr lang="ru-RU"/>
           </a:p>
@@ -2677,7 +2677,7 @@
           <a:p>
             <a:fld id="{DAAE7CA6-6208-4769-8266-A9B1180A8781}" type="datetimeFigureOut">
               <a:rPr lang="ru-RU" smtClean="0"/>
-              <a:t>10.06.2023</a:t>
+              <a:t>24.06.2023</a:t>
             </a:fld>
             <a:endParaRPr lang="ru-RU"/>
           </a:p>
@@ -2918,7 +2918,7 @@
           <a:p>
             <a:fld id="{DAAE7CA6-6208-4769-8266-A9B1180A8781}" type="datetimeFigureOut">
               <a:rPr lang="ru-RU" smtClean="0"/>
-              <a:t>10.06.2023</a:t>
+              <a:t>24.06.2023</a:t>
             </a:fld>
             <a:endParaRPr lang="ru-RU"/>
           </a:p>
@@ -3844,188 +3844,288 @@
       </p:grpSpPr>
       <p:sp>
         <p:nvSpPr>
-          <p:cNvPr id="3" name="Объект 2">
-            <a:extLst>
-              <a:ext uri="{FF2B5EF4-FFF2-40B4-BE49-F238E27FC236}">
-                <a16:creationId xmlns:a16="http://schemas.microsoft.com/office/drawing/2014/main" id="{EB4D34C4-4F2F-BD87-FF63-A55C01F0D523}"/>
-              </a:ext>
-            </a:extLst>
-          </p:cNvPr>
-          <p:cNvSpPr>
-            <a:spLocks noGrp="1"/>
-          </p:cNvSpPr>
-          <p:nvPr>
-            <p:ph idx="1"/>
+          <p:cNvPr id="2" name="Заголовок 1">
+            <a:extLst>
+              <a:ext uri="{FF2B5EF4-FFF2-40B4-BE49-F238E27FC236}">
+                <a16:creationId xmlns:a16="http://schemas.microsoft.com/office/drawing/2014/main" id="{097DEB31-AE9D-1FC9-2441-5CE4E332C1F6}"/>
+              </a:ext>
+            </a:extLst>
+          </p:cNvPr>
+          <p:cNvSpPr>
+            <a:spLocks noGrp="1"/>
+          </p:cNvSpPr>
+          <p:nvPr>
+            <p:ph type="title"/>
           </p:nvPr>
         </p:nvSpPr>
         <p:spPr>
           <a:xfrm>
-            <a:off x="838200" y="810557"/>
-            <a:ext cx="10515600" cy="4351338"/>
+            <a:off x="4828389" y="177346"/>
+            <a:ext cx="2535222" cy="691888"/>
           </a:xfrm>
         </p:spPr>
         <p:txBody>
-          <a:bodyPr/>
-          <a:lstStyle/>
-          <a:p>
-            <a:pPr marL="140970" marR="269240" indent="0" algn="just">
-              <a:lnSpc>
-                <a:spcPct val="150000"/>
-              </a:lnSpc>
-              <a:spcBef>
-                <a:spcPts val="5"/>
-              </a:spcBef>
-              <a:spcAft>
-                <a:spcPts val="0"/>
-              </a:spcAft>
-              <a:buNone/>
-            </a:pPr>
-            <a:r>
-              <a:rPr lang="ru-RU" sz="1800" dirty="0">
-                <a:effectLst/>
-                <a:latin typeface="Times New Roman" panose="02020603050405020304" pitchFamily="18" charset="0"/>
-                <a:ea typeface="Times New Roman" panose="02020603050405020304" pitchFamily="18" charset="0"/>
-              </a:rPr>
-              <a:t>Минимальные технические требования для работы с созданным программным продуктом всего лишь 512 МБ оперативной памяти, однако, чтобы избежать возможных перегрузок устройства, рекомендуется иметь более 2 ГБ оперативной памяти.</a:t>
-            </a:r>
-            <a:endParaRPr lang="en-US" sz="1800" dirty="0">
-              <a:effectLst/>
-              <a:latin typeface="Times New Roman" panose="02020603050405020304" pitchFamily="18" charset="0"/>
-              <a:ea typeface="Times New Roman" panose="02020603050405020304" pitchFamily="18" charset="0"/>
-            </a:endParaRPr>
-          </a:p>
-          <a:p>
-            <a:pPr marL="140970" marR="269240" indent="0" algn="just">
-              <a:lnSpc>
-                <a:spcPct val="150000"/>
-              </a:lnSpc>
-              <a:spcBef>
-                <a:spcPts val="5"/>
-              </a:spcBef>
-              <a:spcAft>
-                <a:spcPts val="0"/>
-              </a:spcAft>
-              <a:buNone/>
-            </a:pPr>
-            <a:endParaRPr lang="ru-RU" sz="1800" dirty="0">
-              <a:effectLst/>
-              <a:latin typeface="Times New Roman" panose="02020603050405020304" pitchFamily="18" charset="0"/>
-              <a:ea typeface="Times New Roman" panose="02020603050405020304" pitchFamily="18" charset="0"/>
-            </a:endParaRPr>
-          </a:p>
-          <a:p>
-            <a:pPr marL="140970" marR="269240" indent="0" algn="just">
-              <a:lnSpc>
-                <a:spcPct val="150000"/>
-              </a:lnSpc>
-              <a:spcBef>
-                <a:spcPts val="5"/>
-              </a:spcBef>
-              <a:spcAft>
-                <a:spcPts val="0"/>
-              </a:spcAft>
-              <a:buNone/>
-            </a:pPr>
-            <a:r>
-              <a:rPr lang="ru-RU" sz="1800" dirty="0">
-                <a:effectLst/>
-                <a:latin typeface="Times New Roman" panose="02020603050405020304" pitchFamily="18" charset="0"/>
-                <a:ea typeface="Times New Roman" panose="02020603050405020304" pitchFamily="18" charset="0"/>
-              </a:rPr>
-              <a:t>Если говорить о пользовательской стороне, то технические требования для посещения разработанного веб-сайта будут соответствовать требованиям использования браузера в целом.</a:t>
-            </a:r>
-            <a:endParaRPr lang="en-US" sz="1800" dirty="0">
-              <a:effectLst/>
-              <a:latin typeface="Times New Roman" panose="02020603050405020304" pitchFamily="18" charset="0"/>
-              <a:ea typeface="Times New Roman" panose="02020603050405020304" pitchFamily="18" charset="0"/>
-            </a:endParaRPr>
-          </a:p>
-          <a:p>
-            <a:pPr marL="140970" marR="269240" indent="0" algn="just">
-              <a:lnSpc>
-                <a:spcPct val="150000"/>
-              </a:lnSpc>
-              <a:spcBef>
-                <a:spcPts val="5"/>
-              </a:spcBef>
-              <a:spcAft>
-                <a:spcPts val="0"/>
-              </a:spcAft>
-              <a:buNone/>
-            </a:pPr>
-            <a:endParaRPr lang="ru-RU" sz="1800" dirty="0">
-              <a:effectLst/>
-              <a:latin typeface="Times New Roman" panose="02020603050405020304" pitchFamily="18" charset="0"/>
-              <a:ea typeface="Times New Roman" panose="02020603050405020304" pitchFamily="18" charset="0"/>
-            </a:endParaRPr>
-          </a:p>
-          <a:p>
-            <a:pPr marL="140970" marR="274955" indent="0" algn="just">
-              <a:lnSpc>
-                <a:spcPct val="150000"/>
-              </a:lnSpc>
-              <a:spcBef>
-                <a:spcPts val="335"/>
-              </a:spcBef>
-              <a:spcAft>
-                <a:spcPts val="0"/>
-              </a:spcAft>
-              <a:buNone/>
-            </a:pPr>
-            <a:r>
-              <a:rPr lang="ru-RU" sz="1800" dirty="0">
-                <a:latin typeface="Times New Roman" panose="02020603050405020304" pitchFamily="18" charset="0"/>
-                <a:ea typeface="Times New Roman" panose="02020603050405020304" pitchFamily="18" charset="0"/>
-              </a:rPr>
-              <a:t>Также</a:t>
-            </a:r>
-            <a:r>
-              <a:rPr lang="ru-RU" sz="1800" dirty="0">
-                <a:effectLst/>
-                <a:latin typeface="Times New Roman" panose="02020603050405020304" pitchFamily="18" charset="0"/>
-                <a:ea typeface="Times New Roman" panose="02020603050405020304" pitchFamily="18" charset="0"/>
-              </a:rPr>
-              <a:t> настоятельно рекомендуется использовать последнюю версию браузера, чтобы избежать проблем с безопасностью и иметь доступ к новым функциям. </a:t>
-            </a:r>
-            <a:endParaRPr lang="ru-RU" dirty="0"/>
-          </a:p>
-        </p:txBody>
-      </p:sp>
-      <p:sp>
-        <p:nvSpPr>
-          <p:cNvPr id="4" name="Заголовок 1">
-            <a:extLst>
-              <a:ext uri="{FF2B5EF4-FFF2-40B4-BE49-F238E27FC236}">
-                <a16:creationId xmlns:a16="http://schemas.microsoft.com/office/drawing/2014/main" id="{27F0E3AC-289E-A063-CE8B-844673BEE75A}"/>
-              </a:ext>
-            </a:extLst>
-          </p:cNvPr>
-          <p:cNvSpPr>
-            <a:spLocks noGrp="1"/>
-          </p:cNvSpPr>
-          <p:nvPr>
-            <p:ph type="title"/>
+          <a:bodyPr>
+            <a:normAutofit/>
+          </a:bodyPr>
+          <a:lstStyle/>
+          <a:p>
+            <a:pPr algn="ctr"/>
+            <a:r>
+              <a:rPr lang="ru-RU" sz="3200" b="1" dirty="0">
+                <a:latin typeface="Times New Roman" panose="02020603050405020304" pitchFamily="18" charset="0"/>
+                <a:cs typeface="Times New Roman" panose="02020603050405020304" pitchFamily="18" charset="0"/>
+              </a:rPr>
+              <a:t>Заключение</a:t>
+            </a:r>
+          </a:p>
+        </p:txBody>
+      </p:sp>
+      <p:sp>
+        <p:nvSpPr>
+          <p:cNvPr id="3" name="Объект 2">
+            <a:extLst>
+              <a:ext uri="{FF2B5EF4-FFF2-40B4-BE49-F238E27FC236}">
+                <a16:creationId xmlns:a16="http://schemas.microsoft.com/office/drawing/2014/main" id="{8B8AB4AE-872E-7661-ADB1-22AA2D2C8E38}"/>
+              </a:ext>
+            </a:extLst>
+          </p:cNvPr>
+          <p:cNvSpPr>
+            <a:spLocks noGrp="1"/>
+          </p:cNvSpPr>
+          <p:nvPr>
+            <p:ph idx="1"/>
           </p:nvPr>
         </p:nvSpPr>
         <p:spPr>
           <a:xfrm>
-            <a:off x="838200" y="113455"/>
-            <a:ext cx="10515600" cy="448607"/>
+            <a:off x="838200" y="906013"/>
+            <a:ext cx="10515600" cy="4899169"/>
           </a:xfrm>
         </p:spPr>
         <p:txBody>
           <a:bodyPr>
-            <a:normAutofit fontScale="90000"/>
+            <a:normAutofit fontScale="85000" lnSpcReduction="20000"/>
           </a:bodyPr>
           <a:lstStyle/>
           <a:p>
-            <a:pPr algn="ctr"/>
-            <a:r>
-              <a:rPr lang="ru-RU" sz="3200" b="1" dirty="0">
-                <a:latin typeface="Times New Roman" panose="02020603050405020304" pitchFamily="18" charset="0"/>
-                <a:cs typeface="Times New Roman" panose="02020603050405020304" pitchFamily="18" charset="0"/>
-              </a:rPr>
-              <a:t>Технические требования</a:t>
+            <a:pPr marL="0" indent="0" algn="just">
+              <a:buNone/>
+            </a:pPr>
+            <a:r>
+              <a:rPr lang="ru-RU" sz="2400" dirty="0">
+                <a:latin typeface="Times New Roman" panose="02020603050405020304" pitchFamily="18" charset="0"/>
+                <a:cs typeface="Times New Roman" panose="02020603050405020304" pitchFamily="18" charset="0"/>
+              </a:rPr>
+              <a:t>Целью дипломного проекта являлось создание доступной информационной платформы для предприятия АО </a:t>
+            </a:r>
+            <a:r>
+              <a:rPr lang="en-US" sz="2400" dirty="0">
+                <a:latin typeface="Times New Roman" panose="02020603050405020304" pitchFamily="18" charset="0"/>
+                <a:cs typeface="Times New Roman" panose="02020603050405020304" pitchFamily="18" charset="0"/>
+              </a:rPr>
+              <a:t>“</a:t>
+            </a:r>
+            <a:r>
+              <a:rPr lang="ru-RU" sz="2400" dirty="0">
+                <a:latin typeface="Times New Roman" panose="02020603050405020304" pitchFamily="18" charset="0"/>
+                <a:cs typeface="Times New Roman" panose="02020603050405020304" pitchFamily="18" charset="0"/>
+              </a:rPr>
+              <a:t>ВО </a:t>
+            </a:r>
+            <a:r>
+              <a:rPr lang="en-US" sz="2400" dirty="0">
+                <a:latin typeface="Times New Roman" panose="02020603050405020304" pitchFamily="18" charset="0"/>
+                <a:cs typeface="Times New Roman" panose="02020603050405020304" pitchFamily="18" charset="0"/>
+              </a:rPr>
+              <a:t>”</a:t>
+            </a:r>
+            <a:r>
+              <a:rPr lang="ru-RU" sz="2400" dirty="0">
+                <a:latin typeface="Times New Roman" panose="02020603050405020304" pitchFamily="18" charset="0"/>
+                <a:cs typeface="Times New Roman" panose="02020603050405020304" pitchFamily="18" charset="0"/>
+              </a:rPr>
+              <a:t>Машиноимпорт</a:t>
+            </a:r>
+            <a:r>
+              <a:rPr lang="en-US" sz="2400" dirty="0">
+                <a:latin typeface="Times New Roman" panose="02020603050405020304" pitchFamily="18" charset="0"/>
+                <a:cs typeface="Times New Roman" panose="02020603050405020304" pitchFamily="18" charset="0"/>
+              </a:rPr>
+              <a:t>”.</a:t>
+            </a:r>
+            <a:endParaRPr lang="ru-RU" sz="2400" dirty="0">
+              <a:latin typeface="Times New Roman" panose="02020603050405020304" pitchFamily="18" charset="0"/>
+              <a:cs typeface="Times New Roman" panose="02020603050405020304" pitchFamily="18" charset="0"/>
+            </a:endParaRPr>
+          </a:p>
+          <a:p>
+            <a:pPr marL="0" indent="0" algn="just">
+              <a:buNone/>
+            </a:pPr>
+            <a:endParaRPr lang="ru-RU" sz="2400" dirty="0">
+              <a:latin typeface="Times New Roman" panose="02020603050405020304" pitchFamily="18" charset="0"/>
+              <a:cs typeface="Times New Roman" panose="02020603050405020304" pitchFamily="18" charset="0"/>
+            </a:endParaRPr>
+          </a:p>
+          <a:p>
+            <a:pPr marL="0" indent="0" algn="just">
+              <a:buNone/>
+            </a:pPr>
+            <a:r>
+              <a:rPr lang="ru-RU" sz="2400" dirty="0">
+                <a:latin typeface="Times New Roman" panose="02020603050405020304" pitchFamily="18" charset="0"/>
+                <a:cs typeface="Times New Roman" panose="02020603050405020304" pitchFamily="18" charset="0"/>
+              </a:rPr>
+              <a:t>Для этого был разработан веб-сайт с учётом всех требований компании.</a:t>
+            </a:r>
+          </a:p>
+          <a:p>
+            <a:pPr marL="0" indent="0" algn="just">
+              <a:buNone/>
+            </a:pPr>
+            <a:endParaRPr lang="ru-RU" sz="2400" dirty="0">
+              <a:latin typeface="Times New Roman" panose="02020603050405020304" pitchFamily="18" charset="0"/>
+              <a:cs typeface="Times New Roman" panose="02020603050405020304" pitchFamily="18" charset="0"/>
+            </a:endParaRPr>
+          </a:p>
+          <a:p>
+            <a:pPr marL="0" indent="0" algn="just">
+              <a:buNone/>
+            </a:pPr>
+            <a:r>
+              <a:rPr lang="ru-RU" sz="2400" dirty="0">
+                <a:latin typeface="Times New Roman" panose="02020603050405020304" pitchFamily="18" charset="0"/>
+                <a:cs typeface="Times New Roman" panose="02020603050405020304" pitchFamily="18" charset="0"/>
+              </a:rPr>
+              <a:t>В процессе работы студентом были изучены:</a:t>
+            </a:r>
+          </a:p>
+          <a:p>
+            <a:pPr marL="0" indent="0" algn="just">
+              <a:buNone/>
+            </a:pPr>
+            <a:endParaRPr lang="ru-RU" sz="2400" dirty="0">
+              <a:latin typeface="Times New Roman" panose="02020603050405020304" pitchFamily="18" charset="0"/>
+              <a:cs typeface="Times New Roman" panose="02020603050405020304" pitchFamily="18" charset="0"/>
+            </a:endParaRPr>
+          </a:p>
+          <a:p>
+            <a:pPr algn="just"/>
+            <a:r>
+              <a:rPr lang="ru-RU" sz="2400" dirty="0">
+                <a:latin typeface="Times New Roman" panose="02020603050405020304" pitchFamily="18" charset="0"/>
+                <a:cs typeface="Times New Roman" panose="02020603050405020304" pitchFamily="18" charset="0"/>
+              </a:rPr>
+              <a:t>Современные практики веб-дизайна;</a:t>
+            </a:r>
+          </a:p>
+          <a:p>
+            <a:pPr algn="just"/>
+            <a:endParaRPr lang="ru-RU" sz="2400" dirty="0">
+              <a:latin typeface="Times New Roman" panose="02020603050405020304" pitchFamily="18" charset="0"/>
+              <a:cs typeface="Times New Roman" panose="02020603050405020304" pitchFamily="18" charset="0"/>
+            </a:endParaRPr>
+          </a:p>
+          <a:p>
+            <a:pPr algn="just"/>
+            <a:r>
+              <a:rPr lang="ru-RU" sz="2400" dirty="0">
+                <a:latin typeface="Times New Roman" panose="02020603050405020304" pitchFamily="18" charset="0"/>
+                <a:cs typeface="Times New Roman" panose="02020603050405020304" pitchFamily="18" charset="0"/>
+              </a:rPr>
+              <a:t>Методы достижения наилучшего пользовательского опыта;</a:t>
+            </a:r>
+          </a:p>
+          <a:p>
+            <a:pPr algn="just"/>
+            <a:endParaRPr lang="ru-RU" sz="2400" dirty="0">
+              <a:latin typeface="Times New Roman" panose="02020603050405020304" pitchFamily="18" charset="0"/>
+              <a:cs typeface="Times New Roman" panose="02020603050405020304" pitchFamily="18" charset="0"/>
+            </a:endParaRPr>
+          </a:p>
+          <a:p>
+            <a:pPr algn="just"/>
+            <a:r>
+              <a:rPr lang="ru-RU" sz="2400" dirty="0">
+                <a:latin typeface="Times New Roman" panose="02020603050405020304" pitchFamily="18" charset="0"/>
+                <a:cs typeface="Times New Roman" panose="02020603050405020304" pitchFamily="18" charset="0"/>
+              </a:rPr>
+              <a:t>Способы создания функциональной структуры сайта;</a:t>
+            </a:r>
+          </a:p>
+          <a:p>
+            <a:pPr algn="just"/>
+            <a:endParaRPr lang="ru-RU" sz="2400" dirty="0">
+              <a:latin typeface="Times New Roman" panose="02020603050405020304" pitchFamily="18" charset="0"/>
+              <a:cs typeface="Times New Roman" panose="02020603050405020304" pitchFamily="18" charset="0"/>
+            </a:endParaRPr>
+          </a:p>
+          <a:p>
+            <a:pPr algn="just"/>
+            <a:r>
+              <a:rPr lang="ru-RU" sz="2400" dirty="0">
+                <a:latin typeface="Times New Roman" panose="02020603050405020304" pitchFamily="18" charset="0"/>
+                <a:cs typeface="Times New Roman" panose="02020603050405020304" pitchFamily="18" charset="0"/>
+              </a:rPr>
+              <a:t>Практическое применение программных инструментов в работе над проектом.</a:t>
+            </a:r>
+          </a:p>
+          <a:p>
+            <a:pPr algn="just"/>
+            <a:endParaRPr lang="ru-RU" sz="2400" dirty="0">
+              <a:latin typeface="Times New Roman" panose="02020603050405020304" pitchFamily="18" charset="0"/>
+              <a:cs typeface="Times New Roman" panose="02020603050405020304" pitchFamily="18" charset="0"/>
+            </a:endParaRPr>
+          </a:p>
+          <a:p>
+            <a:pPr algn="just"/>
+            <a:endParaRPr lang="ru-RU" sz="2400" dirty="0">
+              <a:latin typeface="Times New Roman" panose="02020603050405020304" pitchFamily="18" charset="0"/>
+              <a:cs typeface="Times New Roman" panose="02020603050405020304" pitchFamily="18" charset="0"/>
+            </a:endParaRPr>
+          </a:p>
+          <a:p>
+            <a:pPr algn="just"/>
+            <a:endParaRPr lang="ru-RU" sz="2400" dirty="0"/>
+          </a:p>
+        </p:txBody>
+      </p:sp>
+      <p:sp>
+        <p:nvSpPr>
+          <p:cNvPr id="4" name="TextBox 3">
+            <a:extLst>
+              <a:ext uri="{FF2B5EF4-FFF2-40B4-BE49-F238E27FC236}">
+                <a16:creationId xmlns:a16="http://schemas.microsoft.com/office/drawing/2014/main" id="{1EBE4998-11D6-6CB7-7834-F8C665FBA155}"/>
+              </a:ext>
+            </a:extLst>
+          </p:cNvPr>
+          <p:cNvSpPr txBox="1"/>
+          <p:nvPr/>
+        </p:nvSpPr>
+        <p:spPr>
+          <a:xfrm>
+            <a:off x="4067047" y="5878740"/>
+            <a:ext cx="4057906" cy="584775"/>
+          </a:xfrm>
+          <a:prstGeom prst="rect">
+            <a:avLst/>
+          </a:prstGeom>
+          <a:noFill/>
+        </p:spPr>
+        <p:txBody>
+          <a:bodyPr wrap="none" rtlCol="0">
+            <a:spAutoFit/>
+          </a:bodyPr>
+          <a:lstStyle/>
+          <a:p>
+            <a:r>
+              <a:rPr lang="ru-RU" sz="3200" dirty="0">
+                <a:latin typeface="Times New Roman" panose="02020603050405020304" pitchFamily="18" charset="0"/>
+                <a:ea typeface="Cambria" panose="02040503050406030204" pitchFamily="18" charset="0"/>
+                <a:cs typeface="Times New Roman" panose="02020603050405020304" pitchFamily="18" charset="0"/>
+              </a:rPr>
+              <a:t>Спасибо за внимание!</a:t>
             </a:r>
           </a:p>
         </p:txBody>
@@ -4033,7 +4133,7 @@
     </p:spTree>
     <p:extLst>
       <p:ext uri="{BB962C8B-B14F-4D97-AF65-F5344CB8AC3E}">
-        <p14:creationId xmlns:p14="http://schemas.microsoft.com/office/powerpoint/2010/main" val="4023760271"/>
+        <p14:creationId xmlns:p14="http://schemas.microsoft.com/office/powerpoint/2010/main" val="3286258064"/>
       </p:ext>
     </p:extLst>
   </p:cSld>
@@ -4078,8 +4178,8 @@
         </p:nvSpPr>
         <p:spPr>
           <a:xfrm>
-            <a:off x="5021859" y="1071125"/>
-            <a:ext cx="2148281" cy="243281"/>
+            <a:off x="2732014" y="886568"/>
+            <a:ext cx="6727971" cy="243281"/>
           </a:xfrm>
         </p:spPr>
         <p:txBody>
@@ -4088,13 +4188,13 @@
           </a:bodyPr>
           <a:lstStyle/>
           <a:p>
+            <a:pPr algn="ctr"/>
             <a:r>
               <a:rPr lang="ru-RU" sz="3600" b="1" kern="0" dirty="0">
-                <a:effectLst/>
                 <a:latin typeface="Times New Roman" panose="02020603050405020304" pitchFamily="18" charset="0"/>
                 <a:ea typeface="Times New Roman" panose="02020603050405020304" pitchFamily="18" charset="0"/>
               </a:rPr>
-              <a:t>Введение</a:t>
+              <a:t>Цели и задачи дипломного проекта</a:t>
             </a:r>
             <a:br>
               <a:rPr lang="ru-RU" sz="1800" b="1" kern="0" dirty="0">
@@ -4125,39 +4225,165 @@
         </p:nvSpPr>
         <p:spPr>
           <a:xfrm>
-            <a:off x="896923" y="1435537"/>
-            <a:ext cx="10515600" cy="4351338"/>
+            <a:off x="838199" y="1261408"/>
+            <a:ext cx="10515600" cy="5267267"/>
           </a:xfrm>
         </p:spPr>
         <p:txBody>
-          <a:bodyPr/>
-          <a:lstStyle/>
+          <a:bodyPr>
+            <a:normAutofit fontScale="92500" lnSpcReduction="10000"/>
+          </a:bodyPr>
+          <a:lstStyle/>
+          <a:p>
+            <a:pPr algn="just"/>
+            <a:r>
+              <a:rPr lang="ru-RU" sz="2200" dirty="0">
+                <a:latin typeface="Times New Roman" panose="02020603050405020304" pitchFamily="18" charset="0"/>
+                <a:cs typeface="Times New Roman" panose="02020603050405020304" pitchFamily="18" charset="0"/>
+              </a:rPr>
+              <a:t>Создание информационной платформы для клиентов и партнеров;</a:t>
+            </a:r>
+          </a:p>
+          <a:p>
+            <a:pPr algn="just"/>
+            <a:r>
+              <a:rPr lang="ru-RU" sz="2200" dirty="0">
+                <a:latin typeface="Times New Roman" panose="02020603050405020304" pitchFamily="18" charset="0"/>
+                <a:cs typeface="Times New Roman" panose="02020603050405020304" pitchFamily="18" charset="0"/>
+              </a:rPr>
+              <a:t>Повышение имиджа предприятия;</a:t>
+            </a:r>
+          </a:p>
+          <a:p>
+            <a:pPr algn="just"/>
+            <a:r>
+              <a:rPr lang="ru-RU" sz="2200" dirty="0">
+                <a:latin typeface="Times New Roman" panose="02020603050405020304" pitchFamily="18" charset="0"/>
+                <a:cs typeface="Times New Roman" panose="02020603050405020304" pitchFamily="18" charset="0"/>
+              </a:rPr>
+              <a:t>Повышение лояльности и доверия клиентов;</a:t>
+            </a:r>
+          </a:p>
+          <a:p>
+            <a:pPr algn="just"/>
+            <a:r>
+              <a:rPr lang="ru-RU" sz="2200" dirty="0">
+                <a:latin typeface="Times New Roman" panose="02020603050405020304" pitchFamily="18" charset="0"/>
+                <a:cs typeface="Times New Roman" panose="02020603050405020304" pitchFamily="18" charset="0"/>
+              </a:rPr>
+              <a:t>Увеличение узнаваемости компании;</a:t>
+            </a:r>
+          </a:p>
+          <a:p>
+            <a:pPr algn="just"/>
+            <a:r>
+              <a:rPr lang="ru-RU" sz="2200" dirty="0">
+                <a:latin typeface="Times New Roman" panose="02020603050405020304" pitchFamily="18" charset="0"/>
+                <a:cs typeface="Times New Roman" panose="02020603050405020304" pitchFamily="18" charset="0"/>
+              </a:rPr>
+              <a:t>Привлечение новых клиентов;</a:t>
+            </a:r>
+          </a:p>
+          <a:p>
+            <a:pPr algn="just"/>
+            <a:r>
+              <a:rPr lang="ru-RU" sz="2200" dirty="0">
+                <a:latin typeface="Times New Roman" panose="02020603050405020304" pitchFamily="18" charset="0"/>
+                <a:cs typeface="Times New Roman" panose="02020603050405020304" pitchFamily="18" charset="0"/>
+              </a:rPr>
+              <a:t>Улучшение доступности информации о предприятии и его деятельности.</a:t>
+            </a:r>
+          </a:p>
           <a:p>
             <a:pPr marL="0" indent="0" algn="just">
               <a:buNone/>
             </a:pPr>
-            <a:r>
-              <a:rPr lang="ru-RU" dirty="0">
-                <a:latin typeface="Times New Roman" panose="02020603050405020304" pitchFamily="18" charset="0"/>
-                <a:cs typeface="Times New Roman" panose="02020603050405020304" pitchFamily="18" charset="0"/>
-              </a:rPr>
-              <a:t>Веб-сайт является неотъемлемым элементом для существования</a:t>
-            </a:r>
-            <a:r>
-              <a:rPr lang="en-US" dirty="0">
-                <a:latin typeface="Times New Roman" panose="02020603050405020304" pitchFamily="18" charset="0"/>
-                <a:cs typeface="Times New Roman" panose="02020603050405020304" pitchFamily="18" charset="0"/>
-              </a:rPr>
-              <a:t> </a:t>
-            </a:r>
-            <a:r>
-              <a:rPr lang="ru-RU" dirty="0">
-                <a:latin typeface="Times New Roman" panose="02020603050405020304" pitchFamily="18" charset="0"/>
-                <a:cs typeface="Times New Roman" panose="02020603050405020304" pitchFamily="18" charset="0"/>
-              </a:rPr>
-              <a:t>компании в современном бизнесе.</a:t>
-            </a:r>
-            <a:endParaRPr lang="en-US" dirty="0">
+            <a:endParaRPr lang="ru-RU" sz="2200" dirty="0">
+              <a:latin typeface="Times New Roman" panose="02020603050405020304" pitchFamily="18" charset="0"/>
+              <a:cs typeface="Times New Roman" panose="02020603050405020304" pitchFamily="18" charset="0"/>
+            </a:endParaRPr>
+          </a:p>
+          <a:p>
+            <a:pPr marL="0" indent="0" algn="just">
+              <a:buNone/>
+            </a:pPr>
+            <a:r>
+              <a:rPr lang="ru-RU" sz="2200" dirty="0">
+                <a:latin typeface="Times New Roman" panose="02020603050405020304" pitchFamily="18" charset="0"/>
+                <a:cs typeface="Times New Roman" panose="02020603050405020304" pitchFamily="18" charset="0"/>
+              </a:rPr>
+              <a:t>Для успешного достижения поставленных целей, необходимо:</a:t>
+            </a:r>
+          </a:p>
+          <a:p>
+            <a:pPr marL="0" indent="0" algn="just">
+              <a:buNone/>
+            </a:pPr>
+            <a:endParaRPr lang="ru-RU" sz="2200" dirty="0">
+              <a:latin typeface="Times New Roman" panose="02020603050405020304" pitchFamily="18" charset="0"/>
+              <a:cs typeface="Times New Roman" panose="02020603050405020304" pitchFamily="18" charset="0"/>
+            </a:endParaRPr>
+          </a:p>
+          <a:p>
+            <a:pPr algn="just"/>
+            <a:r>
+              <a:rPr lang="ru-RU" sz="2200" dirty="0">
+                <a:latin typeface="Times New Roman" panose="02020603050405020304" pitchFamily="18" charset="0"/>
+                <a:cs typeface="Times New Roman" panose="02020603050405020304" pitchFamily="18" charset="0"/>
+              </a:rPr>
+              <a:t>Проанализировать требования компании к веб-сайту;</a:t>
+            </a:r>
+          </a:p>
+          <a:p>
+            <a:pPr algn="just"/>
+            <a:r>
+              <a:rPr lang="ru-RU" sz="2200" dirty="0">
+                <a:latin typeface="Times New Roman" panose="02020603050405020304" pitchFamily="18" charset="0"/>
+                <a:cs typeface="Times New Roman" panose="02020603050405020304" pitchFamily="18" charset="0"/>
+              </a:rPr>
+              <a:t>Изучить рынок программного обеспечения;</a:t>
+            </a:r>
+          </a:p>
+          <a:p>
+            <a:pPr algn="just"/>
+            <a:r>
+              <a:rPr lang="ru-RU" sz="2200" dirty="0">
+                <a:latin typeface="Times New Roman" panose="02020603050405020304" pitchFamily="18" charset="0"/>
+                <a:cs typeface="Times New Roman" panose="02020603050405020304" pitchFamily="18" charset="0"/>
+              </a:rPr>
+              <a:t>Разработать структуру сайта и его дизайн;</a:t>
+            </a:r>
+          </a:p>
+          <a:p>
+            <a:pPr algn="just"/>
+            <a:r>
+              <a:rPr lang="ru-RU" sz="2200" dirty="0">
+                <a:latin typeface="Times New Roman" panose="02020603050405020304" pitchFamily="18" charset="0"/>
+                <a:cs typeface="Times New Roman" panose="02020603050405020304" pitchFamily="18" charset="0"/>
+              </a:rPr>
+              <a:t>Разработать систему для размещения новостных постов;</a:t>
+            </a:r>
+          </a:p>
+          <a:p>
+            <a:pPr algn="just"/>
+            <a:r>
+              <a:rPr lang="ru-RU" sz="2200" dirty="0">
+                <a:latin typeface="Times New Roman" panose="02020603050405020304" pitchFamily="18" charset="0"/>
+                <a:cs typeface="Times New Roman" panose="02020603050405020304" pitchFamily="18" charset="0"/>
+              </a:rPr>
+              <a:t>Протестировать работоспособность разработанного кода;</a:t>
+            </a:r>
+          </a:p>
+          <a:p>
+            <a:pPr algn="just"/>
+            <a:endParaRPr lang="ru-RU" sz="2000" dirty="0">
+              <a:latin typeface="Times New Roman" panose="02020603050405020304" pitchFamily="18" charset="0"/>
+              <a:cs typeface="Times New Roman" panose="02020603050405020304" pitchFamily="18" charset="0"/>
+            </a:endParaRPr>
+          </a:p>
+          <a:p>
+            <a:pPr algn="just"/>
+            <a:endParaRPr lang="ru-RU" sz="2000" dirty="0">
               <a:latin typeface="Times New Roman" panose="02020603050405020304" pitchFamily="18" charset="0"/>
               <a:cs typeface="Times New Roman" panose="02020603050405020304" pitchFamily="18" charset="0"/>
             </a:endParaRPr>
@@ -4172,79 +4398,18 @@
             </a:endParaRPr>
           </a:p>
           <a:p>
-            <a:pPr marL="0" indent="0" algn="just">
-              <a:buNone/>
-            </a:pPr>
-            <a:r>
-              <a:rPr lang="ru-RU" dirty="0">
-                <a:latin typeface="Times New Roman" panose="02020603050405020304" pitchFamily="18" charset="0"/>
-                <a:cs typeface="Times New Roman" panose="02020603050405020304" pitchFamily="18" charset="0"/>
-              </a:rPr>
-              <a:t>Сайт позволяет набирать клиентскую базу, устанавливать контакт с партнерами и повышать уровень доверия.</a:t>
-            </a:r>
-          </a:p>
-          <a:p>
-            <a:pPr marL="0" indent="0" algn="just">
-              <a:buNone/>
-            </a:pPr>
+            <a:pPr algn="just"/>
             <a:endParaRPr lang="ru-RU" dirty="0">
               <a:latin typeface="Times New Roman" panose="02020603050405020304" pitchFamily="18" charset="0"/>
               <a:cs typeface="Times New Roman" panose="02020603050405020304" pitchFamily="18" charset="0"/>
             </a:endParaRPr>
           </a:p>
           <a:p>
-            <a:pPr marL="0" indent="0" algn="just">
-              <a:buNone/>
-            </a:pPr>
-            <a:r>
-              <a:rPr lang="ru-RU" dirty="0">
-                <a:latin typeface="Times New Roman" panose="02020603050405020304" pitchFamily="18" charset="0"/>
-                <a:cs typeface="Times New Roman" panose="02020603050405020304" pitchFamily="18" charset="0"/>
-              </a:rPr>
-              <a:t>Ввиду актуальности этой темы, в рамках настоящей дипломной работы будет рассмотрен процесс создания веб-сайта для компании АО </a:t>
-            </a:r>
-            <a:r>
-              <a:rPr lang="en-US" dirty="0">
-                <a:latin typeface="Times New Roman" panose="02020603050405020304" pitchFamily="18" charset="0"/>
-                <a:cs typeface="Times New Roman" panose="02020603050405020304" pitchFamily="18" charset="0"/>
-              </a:rPr>
-              <a:t>“</a:t>
-            </a:r>
-            <a:r>
-              <a:rPr lang="ru-RU" dirty="0">
-                <a:latin typeface="Times New Roman" panose="02020603050405020304" pitchFamily="18" charset="0"/>
-                <a:cs typeface="Times New Roman" panose="02020603050405020304" pitchFamily="18" charset="0"/>
-              </a:rPr>
-              <a:t>ВО </a:t>
-            </a:r>
-            <a:r>
-              <a:rPr lang="en-US" dirty="0">
-                <a:latin typeface="Times New Roman" panose="02020603050405020304" pitchFamily="18" charset="0"/>
-                <a:cs typeface="Times New Roman" panose="02020603050405020304" pitchFamily="18" charset="0"/>
-              </a:rPr>
-              <a:t>“</a:t>
-            </a:r>
-            <a:r>
-              <a:rPr lang="ru-RU" dirty="0">
-                <a:latin typeface="Times New Roman" panose="02020603050405020304" pitchFamily="18" charset="0"/>
-                <a:cs typeface="Times New Roman" panose="02020603050405020304" pitchFamily="18" charset="0"/>
-              </a:rPr>
-              <a:t>Машиноимпорт</a:t>
-            </a:r>
-            <a:r>
-              <a:rPr lang="en-US" dirty="0">
-                <a:latin typeface="Times New Roman" panose="02020603050405020304" pitchFamily="18" charset="0"/>
-                <a:cs typeface="Times New Roman" panose="02020603050405020304" pitchFamily="18" charset="0"/>
-              </a:rPr>
-              <a:t>”</a:t>
-            </a:r>
-            <a:r>
-              <a:rPr lang="ru-RU" dirty="0">
-                <a:latin typeface="Times New Roman" panose="02020603050405020304" pitchFamily="18" charset="0"/>
-                <a:cs typeface="Times New Roman" panose="02020603050405020304" pitchFamily="18" charset="0"/>
-              </a:rPr>
-              <a:t>. </a:t>
-            </a:r>
+            <a:pPr algn="just"/>
+            <a:endParaRPr lang="ru-RU" dirty="0">
+              <a:latin typeface="Times New Roman" panose="02020603050405020304" pitchFamily="18" charset="0"/>
+              <a:cs typeface="Times New Roman" panose="02020603050405020304" pitchFamily="18" charset="0"/>
+            </a:endParaRPr>
           </a:p>
         </p:txBody>
       </p:sp>
@@ -4651,196 +4816,6 @@
           <p:cNvPr id="2" name="Заголовок 1">
             <a:extLst>
               <a:ext uri="{FF2B5EF4-FFF2-40B4-BE49-F238E27FC236}">
-                <a16:creationId xmlns:a16="http://schemas.microsoft.com/office/drawing/2014/main" id="{7B034CF5-68D4-7265-8918-8DBAF0157625}"/>
-              </a:ext>
-            </a:extLst>
-          </p:cNvPr>
-          <p:cNvSpPr>
-            <a:spLocks noGrp="1"/>
-          </p:cNvSpPr>
-          <p:nvPr>
-            <p:ph type="title"/>
-          </p:nvPr>
-        </p:nvSpPr>
-        <p:spPr>
-          <a:xfrm>
-            <a:off x="838200" y="137696"/>
-            <a:ext cx="10515600" cy="1086681"/>
-          </a:xfrm>
-        </p:spPr>
-        <p:txBody>
-          <a:bodyPr>
-            <a:normAutofit/>
-          </a:bodyPr>
-          <a:lstStyle/>
-          <a:p>
-            <a:pPr algn="ctr"/>
-            <a:r>
-              <a:rPr lang="ru-RU" sz="3600" b="1" dirty="0">
-                <a:latin typeface="Times New Roman" panose="02020603050405020304" pitchFamily="18" charset="0"/>
-                <a:cs typeface="Times New Roman" panose="02020603050405020304" pitchFamily="18" charset="0"/>
-              </a:rPr>
-              <a:t>Описание целей проекта</a:t>
-            </a:r>
-            <a:endParaRPr lang="ru-RU" sz="3600" dirty="0"/>
-          </a:p>
-        </p:txBody>
-      </p:sp>
-      <p:sp>
-        <p:nvSpPr>
-          <p:cNvPr id="3" name="Объект 2">
-            <a:extLst>
-              <a:ext uri="{FF2B5EF4-FFF2-40B4-BE49-F238E27FC236}">
-                <a16:creationId xmlns:a16="http://schemas.microsoft.com/office/drawing/2014/main" id="{2AEB131B-5C83-9686-A706-88CD3E2166F6}"/>
-              </a:ext>
-            </a:extLst>
-          </p:cNvPr>
-          <p:cNvSpPr>
-            <a:spLocks noGrp="1"/>
-          </p:cNvSpPr>
-          <p:nvPr>
-            <p:ph idx="1"/>
-          </p:nvPr>
-        </p:nvSpPr>
-        <p:spPr>
-          <a:xfrm>
-            <a:off x="838200" y="1471444"/>
-            <a:ext cx="10515600" cy="4351338"/>
-          </a:xfrm>
-        </p:spPr>
-        <p:txBody>
-          <a:bodyPr>
-            <a:normAutofit/>
-          </a:bodyPr>
-          <a:lstStyle/>
-          <a:p>
-            <a:pPr marL="0" indent="0" algn="just">
-              <a:buNone/>
-            </a:pPr>
-            <a:r>
-              <a:rPr lang="ru-RU" sz="2000" dirty="0">
-                <a:latin typeface="Times New Roman" panose="02020603050405020304" pitchFamily="18" charset="0"/>
-                <a:cs typeface="Times New Roman" panose="02020603050405020304" pitchFamily="18" charset="0"/>
-              </a:rPr>
-              <a:t>Ввиду стремительной виртуализации, изменяются и давно сложившиеся понятия маркетинга, конкуренции и функционирования компании. </a:t>
-            </a:r>
-          </a:p>
-          <a:p>
-            <a:pPr marL="0" indent="0" algn="just">
-              <a:buNone/>
-            </a:pPr>
-            <a:endParaRPr lang="ru-RU" sz="2000" dirty="0">
-              <a:latin typeface="Times New Roman" panose="02020603050405020304" pitchFamily="18" charset="0"/>
-              <a:cs typeface="Times New Roman" panose="02020603050405020304" pitchFamily="18" charset="0"/>
-            </a:endParaRPr>
-          </a:p>
-          <a:p>
-            <a:pPr marL="0" indent="0" algn="just">
-              <a:buNone/>
-            </a:pPr>
-            <a:r>
-              <a:rPr lang="ru-RU" sz="2000" dirty="0">
-                <a:latin typeface="Times New Roman" panose="02020603050405020304" pitchFamily="18" charset="0"/>
-                <a:cs typeface="Times New Roman" panose="02020603050405020304" pitchFamily="18" charset="0"/>
-              </a:rPr>
-              <a:t>Сегодня самым удобным способом узнать информацию о предприятии является запрос в поисковой строке браузера. Крайне важным является наличие у компании веб-сайта. </a:t>
-            </a:r>
-          </a:p>
-          <a:p>
-            <a:pPr marL="0" indent="0" algn="just">
-              <a:buNone/>
-            </a:pPr>
-            <a:endParaRPr lang="ru-RU" sz="2000" dirty="0">
-              <a:latin typeface="Times New Roman" panose="02020603050405020304" pitchFamily="18" charset="0"/>
-              <a:cs typeface="Times New Roman" panose="02020603050405020304" pitchFamily="18" charset="0"/>
-            </a:endParaRPr>
-          </a:p>
-          <a:p>
-            <a:pPr marL="0" indent="0" algn="just">
-              <a:buNone/>
-            </a:pPr>
-            <a:r>
-              <a:rPr lang="ru-RU" sz="2000" dirty="0">
-                <a:latin typeface="Times New Roman" panose="02020603050405020304" pitchFamily="18" charset="0"/>
-                <a:cs typeface="Times New Roman" panose="02020603050405020304" pitchFamily="18" charset="0"/>
-              </a:rPr>
-              <a:t>Сайт поможет предприятию: </a:t>
-            </a:r>
-          </a:p>
-          <a:p>
-            <a:pPr algn="just"/>
-            <a:r>
-              <a:rPr lang="ru-RU" sz="2000" dirty="0">
-                <a:effectLst/>
-                <a:latin typeface="Times New Roman" panose="02020603050405020304" pitchFamily="18" charset="0"/>
-                <a:ea typeface="Times New Roman" panose="02020603050405020304" pitchFamily="18" charset="0"/>
-              </a:rPr>
-              <a:t>Расширить рынка сбыта;</a:t>
-            </a:r>
-          </a:p>
-          <a:p>
-            <a:pPr algn="just"/>
-            <a:r>
-              <a:rPr lang="ru-RU" sz="2000" dirty="0">
-                <a:effectLst/>
-                <a:latin typeface="Times New Roman" panose="02020603050405020304" pitchFamily="18" charset="0"/>
-                <a:ea typeface="Times New Roman" panose="02020603050405020304" pitchFamily="18" charset="0"/>
-              </a:rPr>
-              <a:t>Улучшить коммуникацию с клиентами и партнерами;</a:t>
-            </a:r>
-          </a:p>
-          <a:p>
-            <a:pPr algn="just"/>
-            <a:r>
-              <a:rPr lang="ru-RU" sz="2000" dirty="0">
-                <a:effectLst/>
-                <a:latin typeface="Times New Roman" panose="02020603050405020304" pitchFamily="18" charset="0"/>
-                <a:ea typeface="Times New Roman" panose="02020603050405020304" pitchFamily="18" charset="0"/>
-              </a:rPr>
-              <a:t>Увеличить узнаваемость компании и так далее. </a:t>
-            </a:r>
-            <a:endParaRPr lang="ru-RU" sz="2000" dirty="0">
-              <a:latin typeface="Times New Roman" panose="02020603050405020304" pitchFamily="18" charset="0"/>
-              <a:cs typeface="Times New Roman" panose="02020603050405020304" pitchFamily="18" charset="0"/>
-            </a:endParaRPr>
-          </a:p>
-        </p:txBody>
-      </p:sp>
-    </p:spTree>
-    <p:extLst>
-      <p:ext uri="{BB962C8B-B14F-4D97-AF65-F5344CB8AC3E}">
-        <p14:creationId xmlns:p14="http://schemas.microsoft.com/office/powerpoint/2010/main" val="474086234"/>
-      </p:ext>
-    </p:extLst>
-  </p:cSld>
-  <p:clrMapOvr>
-    <a:masterClrMapping/>
-  </p:clrMapOvr>
-</p:sld>
-</file>
-
-<file path=ppt/slides/slide5.xml><?xml version="1.0" encoding="utf-8"?>
-<p:sld xmlns:a="http://schemas.openxmlformats.org/drawingml/2006/main" xmlns:r="http://schemas.openxmlformats.org/officeDocument/2006/relationships" xmlns:p="http://schemas.openxmlformats.org/presentationml/2006/main">
-  <p:cSld>
-    <p:spTree>
-      <p:nvGrpSpPr>
-        <p:cNvPr id="1" name=""/>
-        <p:cNvGrpSpPr/>
-        <p:nvPr/>
-      </p:nvGrpSpPr>
-      <p:grpSpPr>
-        <a:xfrm>
-          <a:off x="0" y="0"/>
-          <a:ext cx="0" cy="0"/>
-          <a:chOff x="0" y="0"/>
-          <a:chExt cx="0" cy="0"/>
-        </a:xfrm>
-      </p:grpSpPr>
-      <p:sp>
-        <p:nvSpPr>
-          <p:cNvPr id="2" name="Заголовок 1">
-            <a:extLst>
-              <a:ext uri="{FF2B5EF4-FFF2-40B4-BE49-F238E27FC236}">
                 <a16:creationId xmlns:a16="http://schemas.microsoft.com/office/drawing/2014/main" id="{3E598DD4-F9AF-C996-7D88-796021D53033}"/>
               </a:ext>
             </a:extLst>
@@ -5077,7 +5052,7 @@
 </p:sld>
 </file>
 
-<file path=ppt/slides/slide6.xml><?xml version="1.0" encoding="utf-8"?>
+<file path=ppt/slides/slide5.xml><?xml version="1.0" encoding="utf-8"?>
 <p:sld xmlns:a="http://schemas.openxmlformats.org/drawingml/2006/main" xmlns:r="http://schemas.openxmlformats.org/officeDocument/2006/relationships" xmlns:p="http://schemas.openxmlformats.org/presentationml/2006/main">
   <p:cSld>
     <p:spTree>
@@ -5112,8 +5087,8 @@
         </p:nvSpPr>
         <p:spPr>
           <a:xfrm>
-            <a:off x="838200" y="18256"/>
-            <a:ext cx="10515600" cy="921312"/>
+            <a:off x="838200" y="284974"/>
+            <a:ext cx="10515600" cy="654593"/>
           </a:xfrm>
         </p:spPr>
         <p:txBody>
@@ -5314,6 +5289,364 @@
 </p:sld>
 </file>
 
+<file path=ppt/slides/slide6.xml><?xml version="1.0" encoding="utf-8"?>
+<p:sld xmlns:a="http://schemas.openxmlformats.org/drawingml/2006/main" xmlns:r="http://schemas.openxmlformats.org/officeDocument/2006/relationships" xmlns:p="http://schemas.openxmlformats.org/presentationml/2006/main">
+  <p:cSld>
+    <p:spTree>
+      <p:nvGrpSpPr>
+        <p:cNvPr id="1" name=""/>
+        <p:cNvGrpSpPr/>
+        <p:nvPr/>
+      </p:nvGrpSpPr>
+      <p:grpSpPr>
+        <a:xfrm>
+          <a:off x="0" y="0"/>
+          <a:ext cx="0" cy="0"/>
+          <a:chOff x="0" y="0"/>
+          <a:chExt cx="0" cy="0"/>
+        </a:xfrm>
+      </p:grpSpPr>
+      <p:sp>
+        <p:nvSpPr>
+          <p:cNvPr id="2" name="Заголовок 1">
+            <a:extLst>
+              <a:ext uri="{FF2B5EF4-FFF2-40B4-BE49-F238E27FC236}">
+                <a16:creationId xmlns:a16="http://schemas.microsoft.com/office/drawing/2014/main" id="{FB72BC73-2780-30BE-CA2D-3CF349693D7E}"/>
+              </a:ext>
+            </a:extLst>
+          </p:cNvPr>
+          <p:cNvSpPr>
+            <a:spLocks noGrp="1"/>
+          </p:cNvSpPr>
+          <p:nvPr>
+            <p:ph type="title"/>
+          </p:nvPr>
+        </p:nvSpPr>
+        <p:spPr>
+          <a:xfrm>
+            <a:off x="838200" y="92279"/>
+            <a:ext cx="10515600" cy="1099060"/>
+          </a:xfrm>
+        </p:spPr>
+        <p:txBody>
+          <a:bodyPr>
+            <a:normAutofit/>
+          </a:bodyPr>
+          <a:lstStyle/>
+          <a:p>
+            <a:pPr algn="ctr"/>
+            <a:r>
+              <a:rPr lang="ru-RU" sz="3200" b="1" dirty="0">
+                <a:latin typeface="Times New Roman" panose="02020603050405020304" pitchFamily="18" charset="0"/>
+                <a:cs typeface="Times New Roman" panose="02020603050405020304" pitchFamily="18" charset="0"/>
+              </a:rPr>
+              <a:t>Обоснование выбора внедряемой системы</a:t>
+            </a:r>
+          </a:p>
+        </p:txBody>
+      </p:sp>
+      <p:sp>
+        <p:nvSpPr>
+          <p:cNvPr id="3" name="Объект 2">
+            <a:extLst>
+              <a:ext uri="{FF2B5EF4-FFF2-40B4-BE49-F238E27FC236}">
+                <a16:creationId xmlns:a16="http://schemas.microsoft.com/office/drawing/2014/main" id="{B48B9830-5D7D-9BC1-0C03-AA38E79745BA}"/>
+              </a:ext>
+            </a:extLst>
+          </p:cNvPr>
+          <p:cNvSpPr>
+            <a:spLocks noGrp="1"/>
+          </p:cNvSpPr>
+          <p:nvPr>
+            <p:ph idx="1"/>
+          </p:nvPr>
+        </p:nvSpPr>
+        <p:spPr>
+          <a:xfrm>
+            <a:off x="838200" y="1174663"/>
+            <a:ext cx="10515600" cy="1325563"/>
+          </a:xfrm>
+        </p:spPr>
+        <p:txBody>
+          <a:bodyPr>
+            <a:noAutofit/>
+          </a:bodyPr>
+          <a:lstStyle/>
+          <a:p>
+            <a:pPr marL="0" indent="0" algn="just">
+              <a:buNone/>
+            </a:pPr>
+            <a:r>
+              <a:rPr lang="ru-RU" sz="2000" dirty="0">
+                <a:latin typeface="Times New Roman" panose="02020603050405020304" pitchFamily="18" charset="0"/>
+                <a:cs typeface="Times New Roman" panose="02020603050405020304" pitchFamily="18" charset="0"/>
+              </a:rPr>
+              <a:t>Вместо использования программ-конструкторов в дипломном проекте будет использована стандартная верстка на </a:t>
+            </a:r>
+            <a:r>
+              <a:rPr lang="en-US" sz="2000" dirty="0">
+                <a:latin typeface="Times New Roman" panose="02020603050405020304" pitchFamily="18" charset="0"/>
+                <a:cs typeface="Times New Roman" panose="02020603050405020304" pitchFamily="18" charset="0"/>
+              </a:rPr>
+              <a:t>HTML </a:t>
+            </a:r>
+            <a:r>
+              <a:rPr lang="ru-RU" sz="2000" dirty="0">
+                <a:latin typeface="Times New Roman" panose="02020603050405020304" pitchFamily="18" charset="0"/>
+                <a:cs typeface="Times New Roman" panose="02020603050405020304" pitchFamily="18" charset="0"/>
+              </a:rPr>
+              <a:t>и </a:t>
+            </a:r>
+            <a:r>
+              <a:rPr lang="en-US" sz="2000" dirty="0">
+                <a:latin typeface="Times New Roman" panose="02020603050405020304" pitchFamily="18" charset="0"/>
+                <a:cs typeface="Times New Roman" panose="02020603050405020304" pitchFamily="18" charset="0"/>
+              </a:rPr>
+              <a:t>CSS</a:t>
+            </a:r>
+            <a:r>
+              <a:rPr lang="ru-RU" sz="2000" dirty="0">
+                <a:latin typeface="Times New Roman" panose="02020603050405020304" pitchFamily="18" charset="0"/>
+                <a:cs typeface="Times New Roman" panose="02020603050405020304" pitchFamily="18" charset="0"/>
+              </a:rPr>
+              <a:t>, так как специальные сервисы хоть и упрощают разработку, но при этом ограничивают свободу действий разработчика, вынуждая его использовать готовые решения вместо создания собственных. </a:t>
+            </a:r>
+          </a:p>
+        </p:txBody>
+      </p:sp>
+      <p:sp>
+        <p:nvSpPr>
+          <p:cNvPr id="4" name="TextBox 3">
+            <a:extLst>
+              <a:ext uri="{FF2B5EF4-FFF2-40B4-BE49-F238E27FC236}">
+                <a16:creationId xmlns:a16="http://schemas.microsoft.com/office/drawing/2014/main" id="{2753DCFE-98CC-07A7-E258-1F18191FBE0D}"/>
+              </a:ext>
+            </a:extLst>
+          </p:cNvPr>
+          <p:cNvSpPr txBox="1"/>
+          <p:nvPr/>
+        </p:nvSpPr>
+        <p:spPr>
+          <a:xfrm>
+            <a:off x="838200" y="2500226"/>
+            <a:ext cx="10515600" cy="3847207"/>
+          </a:xfrm>
+          <a:prstGeom prst="rect">
+            <a:avLst/>
+          </a:prstGeom>
+          <a:noFill/>
+        </p:spPr>
+        <p:txBody>
+          <a:bodyPr wrap="square" rtlCol="0">
+            <a:spAutoFit/>
+          </a:bodyPr>
+          <a:lstStyle/>
+          <a:p>
+            <a:pPr algn="just"/>
+            <a:r>
+              <a:rPr lang="ru-RU" sz="2000" dirty="0">
+                <a:latin typeface="Times New Roman" panose="02020603050405020304" pitchFamily="18" charset="0"/>
+                <a:cs typeface="Times New Roman" panose="02020603050405020304" pitchFamily="18" charset="0"/>
+              </a:rPr>
+              <a:t>Выбор в пользу JavaScript был сделан, так как он является самым распространенным языком во </a:t>
+            </a:r>
+            <a:r>
+              <a:rPr lang="ru-RU" sz="2000" dirty="0" err="1">
+                <a:latin typeface="Times New Roman" panose="02020603050405020304" pitchFamily="18" charset="0"/>
+                <a:cs typeface="Times New Roman" panose="02020603050405020304" pitchFamily="18" charset="0"/>
+              </a:rPr>
+              <a:t>frontend</a:t>
+            </a:r>
+            <a:r>
+              <a:rPr lang="ru-RU" sz="2000" dirty="0">
+                <a:latin typeface="Times New Roman" panose="02020603050405020304" pitchFamily="18" charset="0"/>
+                <a:cs typeface="Times New Roman" panose="02020603050405020304" pitchFamily="18" charset="0"/>
+              </a:rPr>
+              <a:t> разработке.</a:t>
+            </a:r>
+            <a:r>
+              <a:rPr lang="en-US" sz="2000" dirty="0">
+                <a:latin typeface="Times New Roman" panose="02020603050405020304" pitchFamily="18" charset="0"/>
+                <a:cs typeface="Times New Roman" panose="02020603050405020304" pitchFamily="18" charset="0"/>
+              </a:rPr>
+              <a:t> </a:t>
+            </a:r>
+            <a:r>
+              <a:rPr lang="ru-RU" sz="2000" dirty="0">
+                <a:latin typeface="Times New Roman" panose="02020603050405020304" pitchFamily="18" charset="0"/>
+                <a:cs typeface="Times New Roman" panose="02020603050405020304" pitchFamily="18" charset="0"/>
+              </a:rPr>
+              <a:t>Он был создан специально для веб-браузеров</a:t>
+            </a:r>
+            <a:r>
+              <a:rPr lang="en-US" sz="2000" dirty="0">
+                <a:latin typeface="Times New Roman" panose="02020603050405020304" pitchFamily="18" charset="0"/>
+                <a:cs typeface="Times New Roman" panose="02020603050405020304" pitchFamily="18" charset="0"/>
+              </a:rPr>
+              <a:t> </a:t>
+            </a:r>
+            <a:r>
+              <a:rPr lang="ru-RU" sz="2000" dirty="0">
+                <a:latin typeface="Times New Roman" panose="02020603050405020304" pitchFamily="18" charset="0"/>
+                <a:cs typeface="Times New Roman" panose="02020603050405020304" pitchFamily="18" charset="0"/>
+              </a:rPr>
+              <a:t>и имеет огромное количество библиотек и фреймворков.</a:t>
+            </a:r>
+          </a:p>
+          <a:p>
+            <a:pPr algn="just"/>
+            <a:endParaRPr lang="ru-RU" sz="2000" dirty="0">
+              <a:latin typeface="Times New Roman" panose="02020603050405020304" pitchFamily="18" charset="0"/>
+              <a:cs typeface="Times New Roman" panose="02020603050405020304" pitchFamily="18" charset="0"/>
+            </a:endParaRPr>
+          </a:p>
+          <a:p>
+            <a:pPr algn="just"/>
+            <a:r>
+              <a:rPr lang="ru-RU" sz="2000" dirty="0">
+                <a:latin typeface="Times New Roman" panose="02020603050405020304" pitchFamily="18" charset="0"/>
+                <a:cs typeface="Times New Roman" panose="02020603050405020304" pitchFamily="18" charset="0"/>
+              </a:rPr>
+              <a:t>Размещение новостей происходит благодаря </a:t>
+            </a:r>
+            <a:r>
+              <a:rPr lang="en-US" sz="2000" dirty="0">
+                <a:latin typeface="Times New Roman" panose="02020603050405020304" pitchFamily="18" charset="0"/>
+                <a:cs typeface="Times New Roman" panose="02020603050405020304" pitchFamily="18" charset="0"/>
+              </a:rPr>
+              <a:t>Java </a:t>
+            </a:r>
+            <a:r>
+              <a:rPr lang="ru-RU" sz="2000" dirty="0">
+                <a:latin typeface="Times New Roman" panose="02020603050405020304" pitchFamily="18" charset="0"/>
+                <a:cs typeface="Times New Roman" panose="02020603050405020304" pitchFamily="18" charset="0"/>
+              </a:rPr>
+              <a:t>программе, которая добавляет сущность в</a:t>
+            </a:r>
+            <a:r>
+              <a:rPr lang="en-US" sz="2000" dirty="0">
+                <a:latin typeface="Times New Roman" panose="02020603050405020304" pitchFamily="18" charset="0"/>
+                <a:cs typeface="Times New Roman" panose="02020603050405020304" pitchFamily="18" charset="0"/>
+              </a:rPr>
+              <a:t> JSON </a:t>
+            </a:r>
+            <a:r>
+              <a:rPr lang="ru-RU" sz="2000" dirty="0">
+                <a:latin typeface="Times New Roman" panose="02020603050405020304" pitchFamily="18" charset="0"/>
+                <a:cs typeface="Times New Roman" panose="02020603050405020304" pitchFamily="18" charset="0"/>
+              </a:rPr>
+              <a:t>файл. Ключи из </a:t>
+            </a:r>
+            <a:r>
+              <a:rPr lang="en-US" sz="2000" dirty="0">
+                <a:latin typeface="Times New Roman" panose="02020603050405020304" pitchFamily="18" charset="0"/>
+                <a:cs typeface="Times New Roman" panose="02020603050405020304" pitchFamily="18" charset="0"/>
+              </a:rPr>
+              <a:t>JSON</a:t>
+            </a:r>
+            <a:r>
+              <a:rPr lang="ru-RU" sz="2000" dirty="0">
+                <a:latin typeface="Times New Roman" panose="02020603050405020304" pitchFamily="18" charset="0"/>
+                <a:cs typeface="Times New Roman" panose="02020603050405020304" pitchFamily="18" charset="0"/>
+              </a:rPr>
+              <a:t> </a:t>
+            </a:r>
+            <a:r>
+              <a:rPr lang="en-US" sz="2000" dirty="0">
+                <a:latin typeface="Times New Roman" panose="02020603050405020304" pitchFamily="18" charset="0"/>
+                <a:cs typeface="Times New Roman" panose="02020603050405020304" pitchFamily="18" charset="0"/>
+              </a:rPr>
+              <a:t>JavaScript </a:t>
+            </a:r>
+            <a:r>
+              <a:rPr lang="ru-RU" sz="2000" dirty="0">
+                <a:latin typeface="Times New Roman" panose="02020603050405020304" pitchFamily="18" charset="0"/>
+                <a:cs typeface="Times New Roman" panose="02020603050405020304" pitchFamily="18" charset="0"/>
+              </a:rPr>
+              <a:t>программа превращает в </a:t>
+            </a:r>
+            <a:r>
+              <a:rPr lang="en-US" sz="2000" dirty="0">
+                <a:latin typeface="Times New Roman" panose="02020603050405020304" pitchFamily="18" charset="0"/>
+                <a:cs typeface="Times New Roman" panose="02020603050405020304" pitchFamily="18" charset="0"/>
+              </a:rPr>
+              <a:t>HTML </a:t>
+            </a:r>
+            <a:r>
+              <a:rPr lang="ru-RU" sz="2000" dirty="0">
+                <a:latin typeface="Times New Roman" panose="02020603050405020304" pitchFamily="18" charset="0"/>
+                <a:cs typeface="Times New Roman" panose="02020603050405020304" pitchFamily="18" charset="0"/>
+              </a:rPr>
+              <a:t>код. </a:t>
+            </a:r>
+          </a:p>
+          <a:p>
+            <a:pPr algn="just"/>
+            <a:endParaRPr lang="ru-RU" sz="2000" dirty="0">
+              <a:latin typeface="Times New Roman" panose="02020603050405020304" pitchFamily="18" charset="0"/>
+              <a:cs typeface="Times New Roman" panose="02020603050405020304" pitchFamily="18" charset="0"/>
+            </a:endParaRPr>
+          </a:p>
+          <a:p>
+            <a:pPr algn="just"/>
+            <a:r>
+              <a:rPr lang="ru-RU" sz="2000" dirty="0">
+                <a:latin typeface="Times New Roman" panose="02020603050405020304" pitchFamily="18" charset="0"/>
+                <a:cs typeface="Times New Roman" panose="02020603050405020304" pitchFamily="18" charset="0"/>
+              </a:rPr>
+              <a:t>Для размещения постов или новостей на сайте многие предпочитают использовать готовые или специально разработанные CMS</a:t>
+            </a:r>
+            <a:r>
+              <a:rPr lang="en-US" sz="2000" dirty="0">
+                <a:latin typeface="Times New Roman" panose="02020603050405020304" pitchFamily="18" charset="0"/>
+                <a:cs typeface="Times New Roman" panose="02020603050405020304" pitchFamily="18" charset="0"/>
+              </a:rPr>
+              <a:t>, </a:t>
+            </a:r>
+            <a:r>
+              <a:rPr lang="ru-RU" sz="2000" dirty="0">
+                <a:latin typeface="Times New Roman" panose="02020603050405020304" pitchFamily="18" charset="0"/>
+                <a:cs typeface="Times New Roman" panose="02020603050405020304" pitchFamily="18" charset="0"/>
+              </a:rPr>
+              <a:t>которые позволяют манипулировать сайтом, его дизайном, функциональностью и структурой. Однако для рассматриваемого предприятия обширный функционал </a:t>
+            </a:r>
+            <a:r>
+              <a:rPr lang="en-US" sz="2000" dirty="0">
+                <a:latin typeface="Times New Roman" panose="02020603050405020304" pitchFamily="18" charset="0"/>
+                <a:cs typeface="Times New Roman" panose="02020603050405020304" pitchFamily="18" charset="0"/>
+              </a:rPr>
+              <a:t>CMS </a:t>
+            </a:r>
+            <a:r>
+              <a:rPr lang="ru-RU" sz="2000" dirty="0">
+                <a:latin typeface="Times New Roman" panose="02020603050405020304" pitchFamily="18" charset="0"/>
+                <a:cs typeface="Times New Roman" panose="02020603050405020304" pitchFamily="18" charset="0"/>
+              </a:rPr>
+              <a:t>может быть избыточным.</a:t>
+            </a:r>
+          </a:p>
+          <a:p>
+            <a:pPr algn="just"/>
+            <a:endParaRPr lang="ru-RU" sz="2400" dirty="0">
+              <a:latin typeface="Times New Roman" panose="02020603050405020304" pitchFamily="18" charset="0"/>
+              <a:cs typeface="Times New Roman" panose="02020603050405020304" pitchFamily="18" charset="0"/>
+            </a:endParaRPr>
+          </a:p>
+        </p:txBody>
+      </p:sp>
+    </p:spTree>
+    <p:extLst>
+      <p:ext uri="{BB962C8B-B14F-4D97-AF65-F5344CB8AC3E}">
+        <p14:creationId xmlns:p14="http://schemas.microsoft.com/office/powerpoint/2010/main" val="3107280202"/>
+      </p:ext>
+    </p:extLst>
+  </p:cSld>
+  <p:clrMapOvr>
+    <a:masterClrMapping/>
+  </p:clrMapOvr>
+</p:sld>
+</file>
+
 <file path=ppt/slides/slide7.xml><?xml version="1.0" encoding="utf-8"?>
 <p:sld xmlns:a="http://schemas.openxmlformats.org/drawingml/2006/main" xmlns:r="http://schemas.openxmlformats.org/officeDocument/2006/relationships" xmlns:p="http://schemas.openxmlformats.org/presentationml/2006/main">
   <p:cSld>
@@ -5336,7 +5669,7 @@
           <p:cNvPr id="2" name="Заголовок 1">
             <a:extLst>
               <a:ext uri="{FF2B5EF4-FFF2-40B4-BE49-F238E27FC236}">
-                <a16:creationId xmlns:a16="http://schemas.microsoft.com/office/drawing/2014/main" id="{FB72BC73-2780-30BE-CA2D-3CF349693D7E}"/>
+                <a16:creationId xmlns:a16="http://schemas.microsoft.com/office/drawing/2014/main" id="{01937D27-342B-575E-42E4-DA5CA97E6443}"/>
               </a:ext>
             </a:extLst>
           </p:cNvPr>
@@ -5349,8 +5682,8 @@
         </p:nvSpPr>
         <p:spPr>
           <a:xfrm>
-            <a:off x="838200" y="0"/>
-            <a:ext cx="10515600" cy="1325563"/>
+            <a:off x="838200" y="372697"/>
+            <a:ext cx="10515600" cy="549785"/>
           </a:xfrm>
         </p:spPr>
         <p:txBody>
@@ -5365,7 +5698,7 @@
                 <a:latin typeface="Times New Roman" panose="02020603050405020304" pitchFamily="18" charset="0"/>
                 <a:cs typeface="Times New Roman" panose="02020603050405020304" pitchFamily="18" charset="0"/>
               </a:rPr>
-              <a:t>Обоснование выбора внедряемой системы</a:t>
+              <a:t>Постановка задачи на дипломное проектирование</a:t>
             </a:r>
           </a:p>
         </p:txBody>
@@ -5375,7 +5708,7 @@
           <p:cNvPr id="3" name="Объект 2">
             <a:extLst>
               <a:ext uri="{FF2B5EF4-FFF2-40B4-BE49-F238E27FC236}">
-                <a16:creationId xmlns:a16="http://schemas.microsoft.com/office/drawing/2014/main" id="{B48B9830-5D7D-9BC1-0C03-AA38E79745BA}"/>
+                <a16:creationId xmlns:a16="http://schemas.microsoft.com/office/drawing/2014/main" id="{AE23FA2B-91F7-EB93-2EF8-B779C0773CDA}"/>
               </a:ext>
             </a:extLst>
           </p:cNvPr>
@@ -5388,142 +5721,121 @@
         </p:nvSpPr>
         <p:spPr>
           <a:xfrm>
-            <a:off x="838200" y="1521778"/>
-            <a:ext cx="10515600" cy="1325563"/>
+            <a:off x="1246814" y="1376407"/>
+            <a:ext cx="9698372" cy="4592666"/>
           </a:xfrm>
         </p:spPr>
         <p:txBody>
-          <a:bodyPr>
-            <a:noAutofit/>
-          </a:bodyPr>
+          <a:bodyPr/>
           <a:lstStyle/>
           <a:p>
             <a:pPr marL="0" indent="0" algn="just">
               <a:buNone/>
             </a:pPr>
             <a:r>
-              <a:rPr lang="ru-RU" sz="2400" dirty="0">
-                <a:latin typeface="Times New Roman" panose="02020603050405020304" pitchFamily="18" charset="0"/>
-                <a:cs typeface="Times New Roman" panose="02020603050405020304" pitchFamily="18" charset="0"/>
-              </a:rPr>
-              <a:t>Вместо использования программ-конструкторов в дипломном проекте будет использована стандартная верстка на </a:t>
-            </a:r>
-            <a:r>
-              <a:rPr lang="en-US" sz="2400" dirty="0">
-                <a:latin typeface="Times New Roman" panose="02020603050405020304" pitchFamily="18" charset="0"/>
-                <a:cs typeface="Times New Roman" panose="02020603050405020304" pitchFamily="18" charset="0"/>
-              </a:rPr>
-              <a:t>HTML </a:t>
-            </a:r>
-            <a:r>
-              <a:rPr lang="ru-RU" sz="2400" dirty="0">
-                <a:latin typeface="Times New Roman" panose="02020603050405020304" pitchFamily="18" charset="0"/>
-                <a:cs typeface="Times New Roman" panose="02020603050405020304" pitchFamily="18" charset="0"/>
-              </a:rPr>
-              <a:t>и </a:t>
-            </a:r>
-            <a:r>
-              <a:rPr lang="en-US" sz="2400" dirty="0">
-                <a:latin typeface="Times New Roman" panose="02020603050405020304" pitchFamily="18" charset="0"/>
-                <a:cs typeface="Times New Roman" panose="02020603050405020304" pitchFamily="18" charset="0"/>
-              </a:rPr>
-              <a:t>CSS</a:t>
-            </a:r>
-            <a:r>
-              <a:rPr lang="ru-RU" sz="2400" dirty="0">
-                <a:latin typeface="Times New Roman" panose="02020603050405020304" pitchFamily="18" charset="0"/>
-                <a:cs typeface="Times New Roman" panose="02020603050405020304" pitchFamily="18" charset="0"/>
-              </a:rPr>
-              <a:t>, так как специальные сервисы хоть и упрощают разработку, но при этом ограничивают свободу действий разработчика, вынуждая его использовать готовые решения вместо создания собственных. </a:t>
-            </a:r>
-          </a:p>
-        </p:txBody>
-      </p:sp>
-      <p:sp>
-        <p:nvSpPr>
-          <p:cNvPr id="4" name="TextBox 3">
-            <a:extLst>
-              <a:ext uri="{FF2B5EF4-FFF2-40B4-BE49-F238E27FC236}">
-                <a16:creationId xmlns:a16="http://schemas.microsoft.com/office/drawing/2014/main" id="{2753DCFE-98CC-07A7-E258-1F18191FBE0D}"/>
-              </a:ext>
-            </a:extLst>
-          </p:cNvPr>
-          <p:cNvSpPr txBox="1"/>
-          <p:nvPr/>
-        </p:nvSpPr>
-        <p:spPr>
-          <a:xfrm>
-            <a:off x="838200" y="3504192"/>
-            <a:ext cx="10515600" cy="1200329"/>
-          </a:xfrm>
-          <a:prstGeom prst="rect">
-            <a:avLst/>
-          </a:prstGeom>
-          <a:noFill/>
-        </p:spPr>
-        <p:txBody>
-          <a:bodyPr wrap="square" rtlCol="0">
-            <a:spAutoFit/>
-          </a:bodyPr>
-          <a:lstStyle/>
+              <a:rPr lang="ru-RU" sz="2000" dirty="0">
+                <a:latin typeface="Times New Roman" panose="02020603050405020304" pitchFamily="18" charset="0"/>
+                <a:cs typeface="Times New Roman" panose="02020603050405020304" pitchFamily="18" charset="0"/>
+              </a:rPr>
+              <a:t>У предприятия есть ряд требований, выдвигаемых к разрабатываемому веб-сайту:</a:t>
+            </a:r>
+          </a:p>
+          <a:p>
+            <a:pPr marL="0" indent="0" algn="just">
+              <a:buNone/>
+            </a:pPr>
+            <a:endParaRPr lang="ru-RU" sz="2000" dirty="0">
+              <a:latin typeface="Times New Roman" panose="02020603050405020304" pitchFamily="18" charset="0"/>
+              <a:cs typeface="Times New Roman" panose="02020603050405020304" pitchFamily="18" charset="0"/>
+            </a:endParaRPr>
+          </a:p>
           <a:p>
             <a:pPr algn="just"/>
             <a:r>
-              <a:rPr lang="ru-RU" sz="2400" dirty="0">
-                <a:latin typeface="Times New Roman" panose="02020603050405020304" pitchFamily="18" charset="0"/>
-                <a:cs typeface="Times New Roman" panose="02020603050405020304" pitchFamily="18" charset="0"/>
-              </a:rPr>
-              <a:t>Выбор в пользу JavaScript был сделан, так как он является самым распространенным языком во </a:t>
-            </a:r>
-            <a:r>
-              <a:rPr lang="ru-RU" sz="2400" dirty="0" err="1">
-                <a:latin typeface="Times New Roman" panose="02020603050405020304" pitchFamily="18" charset="0"/>
-                <a:cs typeface="Times New Roman" panose="02020603050405020304" pitchFamily="18" charset="0"/>
-              </a:rPr>
-              <a:t>frontend</a:t>
-            </a:r>
-            <a:r>
-              <a:rPr lang="ru-RU" sz="2400" dirty="0">
-                <a:latin typeface="Times New Roman" panose="02020603050405020304" pitchFamily="18" charset="0"/>
-                <a:cs typeface="Times New Roman" panose="02020603050405020304" pitchFamily="18" charset="0"/>
-              </a:rPr>
-              <a:t> разработке.</a:t>
-            </a:r>
-            <a:r>
-              <a:rPr lang="en-US" sz="2400" dirty="0">
-                <a:latin typeface="Times New Roman" panose="02020603050405020304" pitchFamily="18" charset="0"/>
-                <a:cs typeface="Times New Roman" panose="02020603050405020304" pitchFamily="18" charset="0"/>
-              </a:rPr>
-              <a:t> </a:t>
-            </a:r>
-            <a:r>
-              <a:rPr lang="ru-RU" sz="2400" dirty="0">
-                <a:latin typeface="Times New Roman" panose="02020603050405020304" pitchFamily="18" charset="0"/>
-                <a:cs typeface="Times New Roman" panose="02020603050405020304" pitchFamily="18" charset="0"/>
-              </a:rPr>
-              <a:t>Он был создан специально для веб-браузеров</a:t>
-            </a:r>
-            <a:r>
-              <a:rPr lang="en-US" sz="2400" dirty="0">
-                <a:latin typeface="Times New Roman" panose="02020603050405020304" pitchFamily="18" charset="0"/>
-                <a:cs typeface="Times New Roman" panose="02020603050405020304" pitchFamily="18" charset="0"/>
-              </a:rPr>
-              <a:t> </a:t>
-            </a:r>
-            <a:r>
-              <a:rPr lang="ru-RU" sz="2400" dirty="0">
-                <a:latin typeface="Times New Roman" panose="02020603050405020304" pitchFamily="18" charset="0"/>
-                <a:cs typeface="Times New Roman" panose="02020603050405020304" pitchFamily="18" charset="0"/>
-              </a:rPr>
-              <a:t>и имеет огромное количество библиотек и фреймворков.</a:t>
-            </a:r>
+              <a:rPr lang="ru-RU" sz="2000" dirty="0">
+                <a:latin typeface="Times New Roman" panose="02020603050405020304" pitchFamily="18" charset="0"/>
+                <a:cs typeface="Times New Roman" panose="02020603050405020304" pitchFamily="18" charset="0"/>
+              </a:rPr>
+              <a:t>Веб-сайт должен представлять из себя информационный ресурс, в котором собраны актуальные данные о компании (описание деятельности, истории, список партнеров, контакты и т.д.);</a:t>
+            </a:r>
+          </a:p>
+          <a:p>
+            <a:pPr algn="just"/>
+            <a:endParaRPr lang="ru-RU" sz="2000" dirty="0">
+              <a:latin typeface="Times New Roman" panose="02020603050405020304" pitchFamily="18" charset="0"/>
+              <a:cs typeface="Times New Roman" panose="02020603050405020304" pitchFamily="18" charset="0"/>
+            </a:endParaRPr>
+          </a:p>
+          <a:p>
+            <a:pPr algn="just"/>
+            <a:r>
+              <a:rPr lang="ru-RU" sz="2000" dirty="0">
+                <a:latin typeface="Times New Roman" panose="02020603050405020304" pitchFamily="18" charset="0"/>
+                <a:cs typeface="Times New Roman" panose="02020603050405020304" pitchFamily="18" charset="0"/>
+              </a:rPr>
+              <a:t>Веб-сайт должен обладать простым и интуитивно понятным интерфейсом;</a:t>
+            </a:r>
+          </a:p>
+          <a:p>
+            <a:pPr algn="just"/>
+            <a:endParaRPr lang="ru-RU" sz="2000" dirty="0">
+              <a:latin typeface="Times New Roman" panose="02020603050405020304" pitchFamily="18" charset="0"/>
+              <a:cs typeface="Times New Roman" panose="02020603050405020304" pitchFamily="18" charset="0"/>
+            </a:endParaRPr>
+          </a:p>
+          <a:p>
+            <a:pPr algn="just"/>
+            <a:r>
+              <a:rPr lang="ru-RU" sz="2000" dirty="0">
+                <a:latin typeface="Times New Roman" panose="02020603050405020304" pitchFamily="18" charset="0"/>
+                <a:cs typeface="Times New Roman" panose="02020603050405020304" pitchFamily="18" charset="0"/>
+              </a:rPr>
+              <a:t>Дизайн веб-сайта должен быть современным, но не слишком сложным.</a:t>
+            </a:r>
+          </a:p>
+          <a:p>
+            <a:pPr algn="just"/>
+            <a:endParaRPr lang="ru-RU" sz="2000" dirty="0">
+              <a:latin typeface="Times New Roman" panose="02020603050405020304" pitchFamily="18" charset="0"/>
+              <a:cs typeface="Times New Roman" panose="02020603050405020304" pitchFamily="18" charset="0"/>
+            </a:endParaRPr>
+          </a:p>
+          <a:p>
+            <a:pPr marL="0" indent="0" algn="just">
+              <a:buNone/>
+            </a:pPr>
+            <a:r>
+              <a:rPr lang="ru-RU" sz="2000" dirty="0">
+                <a:latin typeface="Times New Roman" panose="02020603050405020304" pitchFamily="18" charset="0"/>
+                <a:cs typeface="Times New Roman" panose="02020603050405020304" pitchFamily="18" charset="0"/>
+              </a:rPr>
+              <a:t>В дипломном проекте необходимо разработать продукт, соответствующий требованиям компании. </a:t>
+            </a:r>
+          </a:p>
+          <a:p>
+            <a:endParaRPr lang="ru-RU" sz="2400" dirty="0">
+              <a:latin typeface="Times New Roman" panose="02020603050405020304" pitchFamily="18" charset="0"/>
+              <a:cs typeface="Times New Roman" panose="02020603050405020304" pitchFamily="18" charset="0"/>
+            </a:endParaRPr>
+          </a:p>
+          <a:p>
+            <a:endParaRPr lang="ru-RU" sz="2400" dirty="0">
+              <a:latin typeface="Times New Roman" panose="02020603050405020304" pitchFamily="18" charset="0"/>
+              <a:cs typeface="Times New Roman" panose="02020603050405020304" pitchFamily="18" charset="0"/>
+            </a:endParaRPr>
+          </a:p>
+          <a:p>
+            <a:pPr marL="0" indent="0">
+              <a:buNone/>
+            </a:pPr>
+            <a:endParaRPr lang="ru-RU" dirty="0"/>
           </a:p>
         </p:txBody>
       </p:sp>
     </p:spTree>
     <p:extLst>
       <p:ext uri="{BB962C8B-B14F-4D97-AF65-F5344CB8AC3E}">
-        <p14:creationId xmlns:p14="http://schemas.microsoft.com/office/powerpoint/2010/main" val="3107280202"/>
+        <p14:creationId xmlns:p14="http://schemas.microsoft.com/office/powerpoint/2010/main" val="1217744241"/>
       </p:ext>
     </p:extLst>
   </p:cSld>
@@ -5552,206 +5864,188 @@
       </p:grpSpPr>
       <p:sp>
         <p:nvSpPr>
-          <p:cNvPr id="2" name="Заголовок 1">
-            <a:extLst>
-              <a:ext uri="{FF2B5EF4-FFF2-40B4-BE49-F238E27FC236}">
-                <a16:creationId xmlns:a16="http://schemas.microsoft.com/office/drawing/2014/main" id="{AA5D0846-F4CD-C015-986B-41DA4AF839BE}"/>
-              </a:ext>
-            </a:extLst>
-          </p:cNvPr>
-          <p:cNvSpPr>
-            <a:spLocks noGrp="1"/>
-          </p:cNvSpPr>
-          <p:nvPr>
-            <p:ph type="title"/>
+          <p:cNvPr id="3" name="Объект 2">
+            <a:extLst>
+              <a:ext uri="{FF2B5EF4-FFF2-40B4-BE49-F238E27FC236}">
+                <a16:creationId xmlns:a16="http://schemas.microsoft.com/office/drawing/2014/main" id="{EB4D34C4-4F2F-BD87-FF63-A55C01F0D523}"/>
+              </a:ext>
+            </a:extLst>
+          </p:cNvPr>
+          <p:cNvSpPr>
+            <a:spLocks noGrp="1"/>
+          </p:cNvSpPr>
+          <p:nvPr>
+            <p:ph idx="1"/>
           </p:nvPr>
         </p:nvSpPr>
         <p:spPr>
           <a:xfrm>
-            <a:off x="838200" y="96677"/>
-            <a:ext cx="10515600" cy="683499"/>
+            <a:off x="838200" y="1196450"/>
+            <a:ext cx="10515600" cy="4351338"/>
           </a:xfrm>
         </p:spPr>
         <p:txBody>
-          <a:bodyPr>
-            <a:normAutofit/>
-          </a:bodyPr>
-          <a:lstStyle/>
-          <a:p>
-            <a:pPr algn="ctr"/>
-            <a:r>
-              <a:rPr lang="ru-RU" sz="3200" b="1" dirty="0">
-                <a:latin typeface="Times New Roman" panose="02020603050405020304" pitchFamily="18" charset="0"/>
-                <a:cs typeface="Times New Roman" panose="02020603050405020304" pitchFamily="18" charset="0"/>
-              </a:rPr>
-              <a:t>Размещение новостей</a:t>
-            </a:r>
-          </a:p>
-        </p:txBody>
-      </p:sp>
-      <p:sp>
-        <p:nvSpPr>
-          <p:cNvPr id="3" name="Объект 2">
-            <a:extLst>
-              <a:ext uri="{FF2B5EF4-FFF2-40B4-BE49-F238E27FC236}">
-                <a16:creationId xmlns:a16="http://schemas.microsoft.com/office/drawing/2014/main" id="{C84E880D-2149-4D78-C4AE-A55F73B35402}"/>
-              </a:ext>
-            </a:extLst>
-          </p:cNvPr>
-          <p:cNvSpPr>
-            <a:spLocks noGrp="1"/>
-          </p:cNvSpPr>
-          <p:nvPr>
-            <p:ph idx="1"/>
+          <a:bodyPr/>
+          <a:lstStyle/>
+          <a:p>
+            <a:pPr marL="140970" marR="269240" indent="0" algn="just">
+              <a:lnSpc>
+                <a:spcPct val="150000"/>
+              </a:lnSpc>
+              <a:spcBef>
+                <a:spcPts val="5"/>
+              </a:spcBef>
+              <a:spcAft>
+                <a:spcPts val="0"/>
+              </a:spcAft>
+              <a:buNone/>
+            </a:pPr>
+            <a:r>
+              <a:rPr lang="ru-RU" sz="1800" dirty="0">
+                <a:effectLst/>
+                <a:latin typeface="Times New Roman" panose="02020603050405020304" pitchFamily="18" charset="0"/>
+                <a:ea typeface="Times New Roman" panose="02020603050405020304" pitchFamily="18" charset="0"/>
+              </a:rPr>
+              <a:t>Минимальные технические требования для работы с созданным программным продуктом всего лишь 512 МБ оперативной памяти, однако, чтобы избежать возможных перегрузок устройства, рекомендуется иметь более 2 ГБ оперативной памяти.</a:t>
+            </a:r>
+            <a:endParaRPr lang="en-US" sz="1800" dirty="0">
+              <a:effectLst/>
+              <a:latin typeface="Times New Roman" panose="02020603050405020304" pitchFamily="18" charset="0"/>
+              <a:ea typeface="Times New Roman" panose="02020603050405020304" pitchFamily="18" charset="0"/>
+            </a:endParaRPr>
+          </a:p>
+          <a:p>
+            <a:pPr marL="140970" marR="269240" indent="0" algn="just">
+              <a:lnSpc>
+                <a:spcPct val="150000"/>
+              </a:lnSpc>
+              <a:spcBef>
+                <a:spcPts val="5"/>
+              </a:spcBef>
+              <a:spcAft>
+                <a:spcPts val="0"/>
+              </a:spcAft>
+              <a:buNone/>
+            </a:pPr>
+            <a:endParaRPr lang="ru-RU" sz="1800" dirty="0">
+              <a:effectLst/>
+              <a:latin typeface="Times New Roman" panose="02020603050405020304" pitchFamily="18" charset="0"/>
+              <a:ea typeface="Times New Roman" panose="02020603050405020304" pitchFamily="18" charset="0"/>
+            </a:endParaRPr>
+          </a:p>
+          <a:p>
+            <a:pPr marL="140970" marR="269240" indent="0" algn="just">
+              <a:lnSpc>
+                <a:spcPct val="150000"/>
+              </a:lnSpc>
+              <a:spcBef>
+                <a:spcPts val="5"/>
+              </a:spcBef>
+              <a:spcAft>
+                <a:spcPts val="0"/>
+              </a:spcAft>
+              <a:buNone/>
+            </a:pPr>
+            <a:r>
+              <a:rPr lang="ru-RU" sz="1800" dirty="0">
+                <a:effectLst/>
+                <a:latin typeface="Times New Roman" panose="02020603050405020304" pitchFamily="18" charset="0"/>
+                <a:ea typeface="Times New Roman" panose="02020603050405020304" pitchFamily="18" charset="0"/>
+              </a:rPr>
+              <a:t>Если говорить о пользовательской стороне, то технические требования для посещения разработанного веб-сайта будут соответствовать требованиям использования браузера в целом.</a:t>
+            </a:r>
+            <a:endParaRPr lang="en-US" sz="1800" dirty="0">
+              <a:effectLst/>
+              <a:latin typeface="Times New Roman" panose="02020603050405020304" pitchFamily="18" charset="0"/>
+              <a:ea typeface="Times New Roman" panose="02020603050405020304" pitchFamily="18" charset="0"/>
+            </a:endParaRPr>
+          </a:p>
+          <a:p>
+            <a:pPr marL="140970" marR="269240" indent="0" algn="just">
+              <a:lnSpc>
+                <a:spcPct val="150000"/>
+              </a:lnSpc>
+              <a:spcBef>
+                <a:spcPts val="5"/>
+              </a:spcBef>
+              <a:spcAft>
+                <a:spcPts val="0"/>
+              </a:spcAft>
+              <a:buNone/>
+            </a:pPr>
+            <a:endParaRPr lang="ru-RU" sz="1800" dirty="0">
+              <a:effectLst/>
+              <a:latin typeface="Times New Roman" panose="02020603050405020304" pitchFamily="18" charset="0"/>
+              <a:ea typeface="Times New Roman" panose="02020603050405020304" pitchFamily="18" charset="0"/>
+            </a:endParaRPr>
+          </a:p>
+          <a:p>
+            <a:pPr marL="140970" marR="274955" indent="0" algn="just">
+              <a:lnSpc>
+                <a:spcPct val="150000"/>
+              </a:lnSpc>
+              <a:spcBef>
+                <a:spcPts val="335"/>
+              </a:spcBef>
+              <a:spcAft>
+                <a:spcPts val="0"/>
+              </a:spcAft>
+              <a:buNone/>
+            </a:pPr>
+            <a:r>
+              <a:rPr lang="ru-RU" sz="1800" dirty="0">
+                <a:latin typeface="Times New Roman" panose="02020603050405020304" pitchFamily="18" charset="0"/>
+                <a:ea typeface="Times New Roman" panose="02020603050405020304" pitchFamily="18" charset="0"/>
+              </a:rPr>
+              <a:t>Также</a:t>
+            </a:r>
+            <a:r>
+              <a:rPr lang="ru-RU" sz="1800" dirty="0">
+                <a:effectLst/>
+                <a:latin typeface="Times New Roman" panose="02020603050405020304" pitchFamily="18" charset="0"/>
+                <a:ea typeface="Times New Roman" panose="02020603050405020304" pitchFamily="18" charset="0"/>
+              </a:rPr>
+              <a:t> настоятельно рекомендуется использовать последнюю версию браузера, чтобы избежать проблем с безопасностью и иметь доступ к новым функциям. </a:t>
+            </a:r>
+            <a:endParaRPr lang="ru-RU" dirty="0"/>
+          </a:p>
+        </p:txBody>
+      </p:sp>
+      <p:sp>
+        <p:nvSpPr>
+          <p:cNvPr id="4" name="Заголовок 1">
+            <a:extLst>
+              <a:ext uri="{FF2B5EF4-FFF2-40B4-BE49-F238E27FC236}">
+                <a16:creationId xmlns:a16="http://schemas.microsoft.com/office/drawing/2014/main" id="{27F0E3AC-289E-A063-CE8B-844673BEE75A}"/>
+              </a:ext>
+            </a:extLst>
+          </p:cNvPr>
+          <p:cNvSpPr>
+            <a:spLocks noGrp="1"/>
+          </p:cNvSpPr>
+          <p:nvPr>
+            <p:ph type="title"/>
           </p:nvPr>
         </p:nvSpPr>
         <p:spPr>
           <a:xfrm>
-            <a:off x="838200" y="897622"/>
-            <a:ext cx="10515600" cy="5229516"/>
+            <a:off x="838200" y="490289"/>
+            <a:ext cx="10515600" cy="448607"/>
           </a:xfrm>
         </p:spPr>
         <p:txBody>
           <a:bodyPr>
-            <a:normAutofit lnSpcReduction="10000"/>
+            <a:normAutofit fontScale="90000"/>
           </a:bodyPr>
           <a:lstStyle/>
           <a:p>
-            <a:pPr marL="0" indent="0">
-              <a:buNone/>
-            </a:pPr>
-            <a:r>
-              <a:rPr lang="ru-RU" sz="2000" dirty="0">
-                <a:latin typeface="Times New Roman" panose="02020603050405020304" pitchFamily="18" charset="0"/>
-                <a:cs typeface="Times New Roman" panose="02020603050405020304" pitchFamily="18" charset="0"/>
-              </a:rPr>
-              <a:t>Для компании важна возможность создавать новостные посты, ведь именно благодаря этому заинтересованные лица могут узнавать о новых проектах или планах. Не получится использовать чистый </a:t>
-            </a:r>
-            <a:r>
-              <a:rPr lang="en-US" sz="2000" dirty="0">
-                <a:latin typeface="Times New Roman" panose="02020603050405020304" pitchFamily="18" charset="0"/>
-                <a:cs typeface="Times New Roman" panose="02020603050405020304" pitchFamily="18" charset="0"/>
-              </a:rPr>
-              <a:t>HTML </a:t>
-            </a:r>
-            <a:r>
-              <a:rPr lang="ru-RU" sz="2000" dirty="0">
-                <a:latin typeface="Times New Roman" panose="02020603050405020304" pitchFamily="18" charset="0"/>
-                <a:cs typeface="Times New Roman" panose="02020603050405020304" pitchFamily="18" charset="0"/>
-              </a:rPr>
-              <a:t>для достижения этой цели, так как персонал предприятия может не иметь навыков верстки.</a:t>
-            </a:r>
-          </a:p>
-          <a:p>
-            <a:pPr marL="0" indent="0">
-              <a:buNone/>
-            </a:pPr>
-            <a:endParaRPr lang="ru-RU" sz="2000" dirty="0">
-              <a:latin typeface="Times New Roman" panose="02020603050405020304" pitchFamily="18" charset="0"/>
-              <a:cs typeface="Times New Roman" panose="02020603050405020304" pitchFamily="18" charset="0"/>
-            </a:endParaRPr>
-          </a:p>
-          <a:p>
-            <a:pPr marL="0" indent="0">
-              <a:buNone/>
-            </a:pPr>
-            <a:r>
-              <a:rPr lang="ru-RU" sz="2000" dirty="0">
-                <a:latin typeface="Times New Roman" panose="02020603050405020304" pitchFamily="18" charset="0"/>
-                <a:cs typeface="Times New Roman" panose="02020603050405020304" pitchFamily="18" charset="0"/>
-              </a:rPr>
-              <a:t>Многие предпочитают использовать готовые или специально разработанные CMS</a:t>
-            </a:r>
-            <a:r>
-              <a:rPr lang="en-US" sz="2000" dirty="0">
-                <a:latin typeface="Times New Roman" panose="02020603050405020304" pitchFamily="18" charset="0"/>
-                <a:cs typeface="Times New Roman" panose="02020603050405020304" pitchFamily="18" charset="0"/>
-              </a:rPr>
-              <a:t>, </a:t>
-            </a:r>
-            <a:r>
-              <a:rPr lang="ru-RU" sz="2000" dirty="0">
-                <a:latin typeface="Times New Roman" panose="02020603050405020304" pitchFamily="18" charset="0"/>
-                <a:cs typeface="Times New Roman" panose="02020603050405020304" pitchFamily="18" charset="0"/>
-              </a:rPr>
-              <a:t>которые позволяют манипулировать сайтом, его дизайном, функциональностью и структурой. Однако для рассматриваемого предприятия обширный функционал </a:t>
-            </a:r>
-            <a:r>
-              <a:rPr lang="en-US" sz="2000" dirty="0">
-                <a:latin typeface="Times New Roman" panose="02020603050405020304" pitchFamily="18" charset="0"/>
-                <a:cs typeface="Times New Roman" panose="02020603050405020304" pitchFamily="18" charset="0"/>
-              </a:rPr>
-              <a:t>CMS </a:t>
-            </a:r>
-            <a:r>
-              <a:rPr lang="ru-RU" sz="2000" dirty="0">
-                <a:latin typeface="Times New Roman" panose="02020603050405020304" pitchFamily="18" charset="0"/>
-                <a:cs typeface="Times New Roman" panose="02020603050405020304" pitchFamily="18" charset="0"/>
-              </a:rPr>
-              <a:t>может быть избыточным.</a:t>
-            </a:r>
-          </a:p>
-          <a:p>
-            <a:pPr marL="0" indent="0">
-              <a:buNone/>
-            </a:pPr>
-            <a:endParaRPr lang="ru-RU" sz="2000" dirty="0">
-              <a:latin typeface="Times New Roman" panose="02020603050405020304" pitchFamily="18" charset="0"/>
-              <a:cs typeface="Times New Roman" panose="02020603050405020304" pitchFamily="18" charset="0"/>
-            </a:endParaRPr>
-          </a:p>
-          <a:p>
-            <a:pPr marL="0" indent="0">
-              <a:buNone/>
-            </a:pPr>
-            <a:r>
-              <a:rPr lang="ru-RU" sz="2000" dirty="0">
-                <a:latin typeface="Times New Roman" panose="02020603050405020304" pitchFamily="18" charset="0"/>
-                <a:cs typeface="Times New Roman" panose="02020603050405020304" pitchFamily="18" charset="0"/>
-              </a:rPr>
-              <a:t>Для разработки приложения, которое бы предоставило возможность размещать новости на главной странице, будет использован язык </a:t>
-            </a:r>
-            <a:r>
-              <a:rPr lang="en-US" sz="2000" dirty="0">
-                <a:latin typeface="Times New Roman" panose="02020603050405020304" pitchFamily="18" charset="0"/>
-                <a:cs typeface="Times New Roman" panose="02020603050405020304" pitchFamily="18" charset="0"/>
-              </a:rPr>
-              <a:t>Java</a:t>
-            </a:r>
-            <a:r>
-              <a:rPr lang="ru-RU" sz="2000" dirty="0">
-                <a:latin typeface="Times New Roman" panose="02020603050405020304" pitchFamily="18" charset="0"/>
-                <a:cs typeface="Times New Roman" panose="02020603050405020304" pitchFamily="18" charset="0"/>
-              </a:rPr>
-              <a:t>. Его нередко применяют в веб-разработке, ввиду ряда неоспоримых преимуществ.</a:t>
-            </a:r>
-          </a:p>
-          <a:p>
-            <a:pPr marL="0" indent="0">
-              <a:buNone/>
-            </a:pPr>
-            <a:endParaRPr lang="ru-RU" sz="2000" dirty="0">
-              <a:latin typeface="Times New Roman" panose="02020603050405020304" pitchFamily="18" charset="0"/>
-              <a:cs typeface="Times New Roman" panose="02020603050405020304" pitchFamily="18" charset="0"/>
-            </a:endParaRPr>
-          </a:p>
-          <a:p>
-            <a:pPr marL="0" indent="0">
-              <a:buNone/>
-            </a:pPr>
-            <a:r>
-              <a:rPr lang="de-DE" sz="2000" dirty="0">
-                <a:latin typeface="Times New Roman" panose="02020603050405020304" pitchFamily="18" charset="0"/>
-                <a:cs typeface="Times New Roman" panose="02020603050405020304" pitchFamily="18" charset="0"/>
-              </a:rPr>
-              <a:t>Java </a:t>
-            </a:r>
-            <a:r>
-              <a:rPr lang="ru-RU" sz="2000" dirty="0">
-                <a:latin typeface="Times New Roman" panose="02020603050405020304" pitchFamily="18" charset="0"/>
-                <a:cs typeface="Times New Roman" panose="02020603050405020304" pitchFamily="18" charset="0"/>
-              </a:rPr>
-              <a:t>поддерживает множество фреймворков, имеет высокую производительность и обладает встроенным механизмом сборки мусора, который автоматически удаляет неиспользуемые объекты. </a:t>
+            <a:pPr algn="ctr"/>
+            <a:r>
+              <a:rPr lang="ru-RU" sz="3200" b="1" dirty="0">
+                <a:latin typeface="Times New Roman" panose="02020603050405020304" pitchFamily="18" charset="0"/>
+                <a:cs typeface="Times New Roman" panose="02020603050405020304" pitchFamily="18" charset="0"/>
+              </a:rPr>
+              <a:t>Технические требования</a:t>
             </a:r>
           </a:p>
         </p:txBody>
@@ -5759,7 +6053,7 @@
     </p:spTree>
     <p:extLst>
       <p:ext uri="{BB962C8B-B14F-4D97-AF65-F5344CB8AC3E}">
-        <p14:creationId xmlns:p14="http://schemas.microsoft.com/office/powerpoint/2010/main" val="2229400221"/>
+        <p14:creationId xmlns:p14="http://schemas.microsoft.com/office/powerpoint/2010/main" val="4023760271"/>
       </p:ext>
     </p:extLst>
   </p:cSld>
@@ -5791,7 +6085,7 @@
           <p:cNvPr id="2" name="Заголовок 1">
             <a:extLst>
               <a:ext uri="{FF2B5EF4-FFF2-40B4-BE49-F238E27FC236}">
-                <a16:creationId xmlns:a16="http://schemas.microsoft.com/office/drawing/2014/main" id="{8B0A69E1-28BF-167F-90CA-98098788604D}"/>
+                <a16:creationId xmlns:a16="http://schemas.microsoft.com/office/drawing/2014/main" id="{B8CB4EA0-5EC0-927C-E27A-202E5EE04254}"/>
               </a:ext>
             </a:extLst>
           </p:cNvPr>
@@ -5804,8 +6098,8 @@
         </p:nvSpPr>
         <p:spPr>
           <a:xfrm>
-            <a:off x="838200" y="43168"/>
-            <a:ext cx="10515600" cy="658332"/>
+            <a:off x="1355870" y="18256"/>
+            <a:ext cx="9480259" cy="946478"/>
           </a:xfrm>
         </p:spPr>
         <p:txBody>
@@ -5820,48 +6114,50 @@
                 <a:latin typeface="Times New Roman" panose="02020603050405020304" pitchFamily="18" charset="0"/>
                 <a:cs typeface="Times New Roman" panose="02020603050405020304" pitchFamily="18" charset="0"/>
               </a:rPr>
-              <a:t>Постановка задачи на дипломное проектирование</a:t>
-            </a:r>
-          </a:p>
-        </p:txBody>
-      </p:sp>
-      <p:sp>
-        <p:nvSpPr>
-          <p:cNvPr id="3" name="Объект 2">
-            <a:extLst>
-              <a:ext uri="{FF2B5EF4-FFF2-40B4-BE49-F238E27FC236}">
-                <a16:creationId xmlns:a16="http://schemas.microsoft.com/office/drawing/2014/main" id="{F05E6502-6E4F-C1E9-30CB-A95395F3FD49}"/>
-              </a:ext>
-            </a:extLst>
-          </p:cNvPr>
-          <p:cNvSpPr>
-            <a:spLocks noGrp="1"/>
-          </p:cNvSpPr>
+              <a:t>Блок-схема программы для размещения новостей</a:t>
+            </a:r>
+          </a:p>
+        </p:txBody>
+      </p:sp>
+      <p:pic>
+        <p:nvPicPr>
+          <p:cNvPr id="11" name="Объект 10">
+            <a:extLst>
+              <a:ext uri="{FF2B5EF4-FFF2-40B4-BE49-F238E27FC236}">
+                <a16:creationId xmlns:a16="http://schemas.microsoft.com/office/drawing/2014/main" id="{C6EB8AEE-EECE-1DB6-56EF-CA335FB0C7D6}"/>
+              </a:ext>
+            </a:extLst>
+          </p:cNvPr>
+          <p:cNvPicPr>
+            <a:picLocks noGrp="1" noChangeAspect="1"/>
+          </p:cNvPicPr>
           <p:nvPr>
             <p:ph idx="1"/>
           </p:nvPr>
-        </p:nvSpPr>
+        </p:nvPicPr>
+        <p:blipFill>
+          <a:blip r:embed="rId2">
+            <a:extLst>
+              <a:ext uri="{28A0092B-C50C-407E-A947-70E740481C1C}">
+                <a14:useLocalDpi xmlns:a14="http://schemas.microsoft.com/office/drawing/2010/main" val="0"/>
+              </a:ext>
+            </a:extLst>
+          </a:blip>
+          <a:stretch>
+            <a:fillRect/>
+          </a:stretch>
+        </p:blipFill>
         <p:spPr>
           <a:xfrm>
-            <a:off x="838200" y="743445"/>
-            <a:ext cx="10515600" cy="4351338"/>
+            <a:off x="4328260" y="898931"/>
+            <a:ext cx="3632892" cy="5959070"/>
           </a:xfrm>
         </p:spPr>
-        <p:txBody>
-          <a:bodyPr/>
-          <a:lstStyle/>
-          <a:p>
-            <a:pPr marL="0" indent="0">
-              <a:buNone/>
-            </a:pPr>
-            <a:endParaRPr lang="ru-RU" dirty="0"/>
-          </a:p>
-        </p:txBody>
-      </p:sp>
+      </p:pic>
     </p:spTree>
     <p:extLst>
       <p:ext uri="{BB962C8B-B14F-4D97-AF65-F5344CB8AC3E}">
-        <p14:creationId xmlns:p14="http://schemas.microsoft.com/office/powerpoint/2010/main" val="3399730994"/>
+        <p14:creationId xmlns:p14="http://schemas.microsoft.com/office/powerpoint/2010/main" val="3393424635"/>
       </p:ext>
     </p:extLst>
   </p:cSld>
